--- a/Entreprenuership/barringer_ent6_chapt_02.pptx
+++ b/Entreprenuership/barringer_ent6_chapt_02.pptx
@@ -1,51 +1,51 @@
 
 <file path=ppt/presentation.xml><?xml version="1.0" encoding="utf-8"?>
-<p:presentation xmlns:a="http://schemas.openxmlformats.org/drawingml/2006/main" xmlns:r="http://schemas.openxmlformats.org/officeDocument/2006/relationships" xmlns:p="http://schemas.openxmlformats.org/presentationml/2006/main" saveSubsetFonts="1">
+<p:presentation xmlns:a="http://schemas.openxmlformats.org/drawingml/2006/main" xmlns:r="http://schemas.openxmlformats.org/officeDocument/2006/relationships" xmlns:p="http://schemas.openxmlformats.org/presentationml/2006/main">
   <p:sldMasterIdLst>
     <p:sldMasterId id="2147483648" r:id="rId1"/>
   </p:sldMasterIdLst>
   <p:notesMasterIdLst>
-    <p:notesMasterId r:id="rId37"/>
+    <p:notesMasterId r:id="rId4"/>
   </p:notesMasterIdLst>
   <p:handoutMasterIdLst>
-    <p:handoutMasterId r:id="rId38"/>
+    <p:handoutMasterId r:id="rId39"/>
   </p:handoutMasterIdLst>
   <p:sldIdLst>
-    <p:sldId id="502" r:id="rId2"/>
-    <p:sldId id="467" r:id="rId3"/>
-    <p:sldId id="469" r:id="rId4"/>
-    <p:sldId id="470" r:id="rId5"/>
-    <p:sldId id="471" r:id="rId6"/>
-    <p:sldId id="472" r:id="rId7"/>
-    <p:sldId id="473" r:id="rId8"/>
-    <p:sldId id="474" r:id="rId9"/>
-    <p:sldId id="475" r:id="rId10"/>
-    <p:sldId id="476" r:id="rId11"/>
-    <p:sldId id="477" r:id="rId12"/>
-    <p:sldId id="478" r:id="rId13"/>
-    <p:sldId id="479" r:id="rId14"/>
-    <p:sldId id="480" r:id="rId15"/>
-    <p:sldId id="481" r:id="rId16"/>
-    <p:sldId id="482" r:id="rId17"/>
-    <p:sldId id="483" r:id="rId18"/>
-    <p:sldId id="484" r:id="rId19"/>
-    <p:sldId id="485" r:id="rId20"/>
-    <p:sldId id="504" r:id="rId21"/>
-    <p:sldId id="486" r:id="rId22"/>
-    <p:sldId id="487" r:id="rId23"/>
-    <p:sldId id="488" r:id="rId24"/>
-    <p:sldId id="489" r:id="rId25"/>
-    <p:sldId id="490" r:id="rId26"/>
-    <p:sldId id="491" r:id="rId27"/>
-    <p:sldId id="492" r:id="rId28"/>
-    <p:sldId id="493" r:id="rId29"/>
-    <p:sldId id="494" r:id="rId30"/>
-    <p:sldId id="495" r:id="rId31"/>
-    <p:sldId id="496" r:id="rId32"/>
-    <p:sldId id="497" r:id="rId33"/>
-    <p:sldId id="498" r:id="rId34"/>
-    <p:sldId id="499" r:id="rId35"/>
-    <p:sldId id="505" r:id="rId36"/>
+    <p:sldId id="502" r:id="rId3"/>
+    <p:sldId id="467" r:id="rId5"/>
+    <p:sldId id="469" r:id="rId6"/>
+    <p:sldId id="470" r:id="rId7"/>
+    <p:sldId id="471" r:id="rId8"/>
+    <p:sldId id="472" r:id="rId9"/>
+    <p:sldId id="473" r:id="rId10"/>
+    <p:sldId id="474" r:id="rId11"/>
+    <p:sldId id="475" r:id="rId12"/>
+    <p:sldId id="476" r:id="rId13"/>
+    <p:sldId id="477" r:id="rId14"/>
+    <p:sldId id="478" r:id="rId15"/>
+    <p:sldId id="479" r:id="rId16"/>
+    <p:sldId id="480" r:id="rId17"/>
+    <p:sldId id="481" r:id="rId18"/>
+    <p:sldId id="482" r:id="rId19"/>
+    <p:sldId id="483" r:id="rId20"/>
+    <p:sldId id="484" r:id="rId21"/>
+    <p:sldId id="485" r:id="rId22"/>
+    <p:sldId id="504" r:id="rId23"/>
+    <p:sldId id="486" r:id="rId24"/>
+    <p:sldId id="487" r:id="rId25"/>
+    <p:sldId id="488" r:id="rId26"/>
+    <p:sldId id="489" r:id="rId27"/>
+    <p:sldId id="490" r:id="rId28"/>
+    <p:sldId id="491" r:id="rId29"/>
+    <p:sldId id="492" r:id="rId30"/>
+    <p:sldId id="493" r:id="rId31"/>
+    <p:sldId id="494" r:id="rId32"/>
+    <p:sldId id="495" r:id="rId33"/>
+    <p:sldId id="496" r:id="rId34"/>
+    <p:sldId id="497" r:id="rId35"/>
+    <p:sldId id="498" r:id="rId36"/>
+    <p:sldId id="499" r:id="rId37"/>
+    <p:sldId id="505" r:id="rId38"/>
   </p:sldIdLst>
   <p:sldSz cx="9144000" cy="6858000" type="screen4x3"/>
   <p:notesSz cx="6858000" cy="9144000"/>
@@ -147,31 +147,17 @@
   <p:extLst>
     <p:ext uri="{EFAFB233-063F-42B5-8137-9DF3F51BA10A}">
       <p15:sldGuideLst xmlns:p15="http://schemas.microsoft.com/office/powerpoint/2012/main">
-        <p15:guide id="1" orient="horz" pos="2160">
+        <p15:guide id="1" orient="horz" pos="2160" userDrawn="1">
           <p15:clr>
             <a:srgbClr val="A4A3A4"/>
           </p15:clr>
         </p15:guide>
-        <p15:guide id="2" pos="2880">
+        <p15:guide id="2" pos="2880" userDrawn="1">
           <p15:clr>
             <a:srgbClr val="A4A3A4"/>
           </p15:clr>
         </p15:guide>
       </p15:sldGuideLst>
-    </p:ext>
-    <p:ext uri="{2D200454-40CA-4A62-9FC3-DE9A4176ACB9}">
-      <p15:notesGuideLst xmlns:p15="http://schemas.microsoft.com/office/powerpoint/2012/main">
-        <p15:guide id="1" orient="horz" pos="2880">
-          <p15:clr>
-            <a:srgbClr val="A4A3A4"/>
-          </p15:clr>
-        </p15:guide>
-        <p15:guide id="2" pos="2160">
-          <p15:clr>
-            <a:srgbClr val="A4A3A4"/>
-          </p15:clr>
-        </p15:guide>
-      </p15:notesGuideLst>
     </p:ext>
   </p:extLst>
 </p:presentation>
@@ -259,8 +245,6 @@
           <a:p>
             <a:fld id="{8D8D874E-E9D5-433B-A149-BDF6BFDD40A8}" type="datetimeFigureOut">
               <a:rPr lang="en-US" smtClean="0"/>
-              <a:pPr/>
-              <a:t>9/9/2025</a:t>
             </a:fld>
             <a:endParaRPr lang="en-US" dirty="0"/>
           </a:p>
@@ -326,19 +310,12 @@
           <a:p>
             <a:fld id="{20DCAA22-461C-45B4-A301-BFCA580174EF}" type="slidenum">
               <a:rPr lang="en-US" smtClean="0"/>
-              <a:pPr/>
-              <a:t>‹#›</a:t>
             </a:fld>
             <a:endParaRPr lang="en-US" dirty="0"/>
           </a:p>
         </p:txBody>
       </p:sp>
     </p:spTree>
-    <p:extLst>
-      <p:ext uri="{BB962C8B-B14F-4D97-AF65-F5344CB8AC3E}">
-        <p14:creationId xmlns:p14="http://schemas.microsoft.com/office/powerpoint/2010/main" val="490192266"/>
-      </p:ext>
-    </p:extLst>
   </p:cSld>
   <p:clrMap bg1="lt1" tx1="dk1" bg2="lt2" tx2="dk2" accent1="accent1" accent2="accent2" accent3="accent3" accent4="accent4" accent5="accent5" accent6="accent6" hlink="hlink" folHlink="folHlink"/>
 </p:handoutMaster>
@@ -426,8 +403,6 @@
           <a:p>
             <a:fld id="{EA051F04-9E25-42C3-8BC5-EC2E8469D95E}" type="datetimeFigureOut">
               <a:rPr lang="en-US" smtClean="0"/>
-              <a:pPr/>
-              <a:t>9/9/2025</a:t>
             </a:fld>
             <a:endParaRPr lang="en-US" dirty="0"/>
           </a:p>
@@ -494,6 +469,7 @@
               <a:rPr lang="en-US" smtClean="0"/>
               <a:t>Click to edit Master text styles</a:t>
             </a:r>
+            <a:endParaRPr lang="en-US" smtClean="0"/>
           </a:p>
           <a:p>
             <a:pPr lvl="1"/>
@@ -501,6 +477,7 @@
               <a:rPr lang="en-US" smtClean="0"/>
               <a:t>Second level</a:t>
             </a:r>
+            <a:endParaRPr lang="en-US" smtClean="0"/>
           </a:p>
           <a:p>
             <a:pPr lvl="2"/>
@@ -508,6 +485,7 @@
               <a:rPr lang="en-US" smtClean="0"/>
               <a:t>Third level</a:t>
             </a:r>
+            <a:endParaRPr lang="en-US" smtClean="0"/>
           </a:p>
           <a:p>
             <a:pPr lvl="3"/>
@@ -515,6 +493,7 @@
               <a:rPr lang="en-US" smtClean="0"/>
               <a:t>Fourth level</a:t>
             </a:r>
+            <a:endParaRPr lang="en-US" smtClean="0"/>
           </a:p>
           <a:p>
             <a:pPr lvl="4"/>
@@ -586,19 +565,12 @@
           <a:p>
             <a:fld id="{A73D6722-9B4D-4E29-B226-C325925A8118}" type="slidenum">
               <a:rPr lang="en-US" smtClean="0"/>
-              <a:pPr/>
-              <a:t>‹#›</a:t>
             </a:fld>
             <a:endParaRPr lang="en-US" dirty="0"/>
           </a:p>
         </p:txBody>
       </p:sp>
     </p:spTree>
-    <p:extLst>
-      <p:ext uri="{BB962C8B-B14F-4D97-AF65-F5344CB8AC3E}">
-        <p14:creationId xmlns:p14="http://schemas.microsoft.com/office/powerpoint/2010/main" val="352959832"/>
-      </p:ext>
-    </p:extLst>
   </p:cSld>
   <p:clrMap bg1="lt1" tx1="dk1" bg2="lt2" tx2="dk2" accent1="accent1" accent2="accent2" accent3="accent3" accent4="accent4" accent5="accent5" accent6="accent6" hlink="hlink" folHlink="folHlink"/>
   <p:notesStyle>
@@ -754,13 +726,13 @@
               <a:buSzTx/>
               <a:buFontTx/>
               <a:buNone/>
-              <a:tabLst/>
               <a:defRPr/>
             </a:pPr>
             <a:r>
               <a:rPr lang="en-IN" dirty="0"/>
               <a:t>If this PowerPoint presentation contains mathematical equations, you may need to check that your computer has the following installed:</a:t>
             </a:r>
+            <a:endParaRPr lang="en-IN" dirty="0"/>
           </a:p>
           <a:p>
             <a:pPr marL="0" marR="0" indent="0" algn="l" defTabSz="914400" rtl="0" eaLnBrk="1" fontAlgn="auto" latinLnBrk="0" hangingPunct="1">
@@ -777,13 +749,13 @@
               <a:buSzTx/>
               <a:buFontTx/>
               <a:buNone/>
-              <a:tabLst/>
               <a:defRPr/>
             </a:pPr>
             <a:r>
               <a:rPr lang="en-IN" dirty="0"/>
               <a:t>1) MathType Plugin</a:t>
             </a:r>
+            <a:endParaRPr lang="en-IN" dirty="0"/>
           </a:p>
           <a:p>
             <a:pPr marL="0" marR="0" indent="0" algn="l" defTabSz="914400" rtl="0" eaLnBrk="1" fontAlgn="auto" latinLnBrk="0" hangingPunct="1">
@@ -800,13 +772,13 @@
               <a:buSzTx/>
               <a:buFontTx/>
               <a:buNone/>
-              <a:tabLst/>
               <a:defRPr/>
             </a:pPr>
             <a:r>
               <a:rPr lang="en-IN" dirty="0"/>
               <a:t>2) Math Player (free versions available)</a:t>
             </a:r>
+            <a:endParaRPr lang="en-IN" dirty="0"/>
           </a:p>
           <a:p>
             <a:pPr marL="0" marR="0" indent="0" algn="l" defTabSz="914400" rtl="0" eaLnBrk="1" fontAlgn="auto" latinLnBrk="0" hangingPunct="1">
@@ -823,7 +795,6 @@
               <a:buSzTx/>
               <a:buFontTx/>
               <a:buNone/>
-              <a:tabLst/>
               <a:defRPr/>
             </a:pPr>
             <a:r>
@@ -835,7 +806,7 @@
               <a:t>)</a:t>
             </a:r>
             <a:endParaRPr lang="en-US" dirty="0">
-              <a:ea typeface="ＭＳ Ｐゴシック" pitchFamily="34" charset="-128"/>
+              <a:ea typeface="MS PGothic" panose="020B0600070205080204" pitchFamily="34" charset="-128"/>
             </a:endParaRPr>
           </a:p>
         </p:txBody>
@@ -857,19 +828,12 @@
           <a:p>
             <a:fld id="{A73D6722-9B4D-4E29-B226-C325925A8118}" type="slidenum">
               <a:rPr lang="en-US" smtClean="0"/>
-              <a:pPr/>
-              <a:t>1</a:t>
             </a:fld>
             <a:endParaRPr lang="en-US" dirty="0"/>
           </a:p>
         </p:txBody>
       </p:sp>
     </p:spTree>
-    <p:extLst>
-      <p:ext uri="{BB962C8B-B14F-4D97-AF65-F5344CB8AC3E}">
-        <p14:creationId xmlns:p14="http://schemas.microsoft.com/office/powerpoint/2010/main" val="2870786308"/>
-      </p:ext>
-    </p:extLst>
   </p:cSld>
   <p:clrMapOvr>
     <a:masterClrMapping/>
@@ -942,19 +906,12 @@
           <a:p>
             <a:fld id="{A73D6722-9B4D-4E29-B226-C325925A8118}" type="slidenum">
               <a:rPr lang="en-US" smtClean="0"/>
-              <a:pPr/>
-              <a:t>24</a:t>
             </a:fld>
             <a:endParaRPr lang="en-US" dirty="0"/>
           </a:p>
         </p:txBody>
       </p:sp>
     </p:spTree>
-    <p:extLst>
-      <p:ext uri="{BB962C8B-B14F-4D97-AF65-F5344CB8AC3E}">
-        <p14:creationId xmlns:p14="http://schemas.microsoft.com/office/powerpoint/2010/main" val="3971926454"/>
-      </p:ext>
-    </p:extLst>
   </p:cSld>
   <p:clrMapOvr>
     <a:masterClrMapping/>
@@ -963,7 +920,7 @@
 </file>
 
 <file path=ppt/slideLayouts/slideLayout1.xml><?xml version="1.0" encoding="utf-8"?>
-<p:sldLayout xmlns:a="http://schemas.openxmlformats.org/drawingml/2006/main" xmlns:r="http://schemas.openxmlformats.org/officeDocument/2006/relationships" xmlns:p="http://schemas.openxmlformats.org/presentationml/2006/main" showMasterSp="0" type="title" preserve="1">
+<p:sldLayout xmlns:a="http://schemas.openxmlformats.org/drawingml/2006/main" xmlns:r="http://schemas.openxmlformats.org/officeDocument/2006/relationships" xmlns:p="http://schemas.openxmlformats.org/presentationml/2006/main" type="title" preserve="1" showMasterSp="0">
   <p:cSld name="Title Slide">
     <p:spTree>
       <p:nvGrpSpPr>
@@ -1228,8 +1185,6 @@
           <a:p>
             <a:fld id="{A9DF6EFB-3F44-496C-A842-1E0B3D3B975A}" type="datetimeFigureOut">
               <a:rPr lang="en-US" smtClean="0"/>
-              <a:pPr/>
-              <a:t>9/9/2025</a:t>
             </a:fld>
             <a:endParaRPr lang="en-US" dirty="0"/>
           </a:p>
@@ -1252,8 +1207,6 @@
           <a:p>
             <a:fld id="{200B2350-5261-4F5C-9DF5-EF0D264FC8D2}" type="slidenum">
               <a:rPr lang="en-US" smtClean="0"/>
-              <a:pPr/>
-              <a:t>‹#›</a:t>
             </a:fld>
             <a:endParaRPr lang="en-US" dirty="0"/>
           </a:p>
@@ -1325,7 +1278,6 @@
               <a:buSzTx/>
               <a:buFontTx/>
               <a:buNone/>
-              <a:tabLst/>
               <a:defRPr/>
             </a:pPr>
             <a:r>
@@ -1352,24 +1304,24 @@
               </a:rPr>
               <a:t>Pearson Education, Ltd. All Rights Reserved.</a:t>
             </a:r>
+            <a:endParaRPr lang="en-US" altLang="en-US" sz="1200" b="0" dirty="0" smtClean="0">
+              <a:latin typeface="Verdana" panose="020B0604030504040204" pitchFamily="34" charset="0"/>
+              <a:ea typeface="Verdana" panose="020B0604030504040204" pitchFamily="34" charset="0"/>
+              <a:cs typeface="Verdana" panose="020B0604030504040204" pitchFamily="34" charset="0"/>
+            </a:endParaRPr>
           </a:p>
         </p:txBody>
       </p:sp>
     </p:spTree>
-    <p:extLst>
-      <p:ext uri="{BB962C8B-B14F-4D97-AF65-F5344CB8AC3E}">
-        <p14:creationId xmlns:p14="http://schemas.microsoft.com/office/powerpoint/2010/main" val="887980693"/>
-      </p:ext>
-    </p:extLst>
   </p:cSld>
   <p:clrMapOvr>
     <a:masterClrMapping/>
   </p:clrMapOvr>
-  <mc:AlternateContent xmlns:mc="http://schemas.openxmlformats.org/markup-compatibility/2006" xmlns:p14="http://schemas.microsoft.com/office/powerpoint/2010/main">
-    <mc:Choice Requires="p14">
+  <mc:AlternateContent xmlns:mc="http://schemas.openxmlformats.org/markup-compatibility/2006">
+    <mc:Choice xmlns:p14="http://schemas.microsoft.com/office/powerpoint/2010/main" Requires="p14">
       <p:transition spd="slow" p14:dur="2000"/>
     </mc:Choice>
-    <mc:Fallback xmlns="">
+    <mc:Fallback>
       <p:transition spd="slow"/>
     </mc:Fallback>
   </mc:AlternateContent>
@@ -1557,6 +1509,7 @@
               <a:rPr lang="en-US" dirty="0" smtClean="0"/>
               <a:t>Click to edit Master text styles</a:t>
             </a:r>
+            <a:endParaRPr lang="en-US" dirty="0" smtClean="0"/>
           </a:p>
         </p:txBody>
       </p:sp>
@@ -1577,8 +1530,6 @@
           <a:p>
             <a:fld id="{A9DF6EFB-3F44-496C-A842-1E0B3D3B975A}" type="datetimeFigureOut">
               <a:rPr lang="en-US" smtClean="0"/>
-              <a:pPr/>
-              <a:t>9/9/2025</a:t>
             </a:fld>
             <a:endParaRPr lang="en-US" dirty="0"/>
           </a:p>
@@ -1601,8 +1552,6 @@
           <a:p>
             <a:fld id="{200B2350-5261-4F5C-9DF5-EF0D264FC8D2}" type="slidenum">
               <a:rPr lang="en-US" smtClean="0"/>
-              <a:pPr/>
-              <a:t>‹#›</a:t>
             </a:fld>
             <a:endParaRPr lang="en-US" dirty="0"/>
           </a:p>
@@ -1628,20 +1577,15 @@
         </p:txBody>
       </p:sp>
     </p:spTree>
-    <p:extLst>
-      <p:ext uri="{BB962C8B-B14F-4D97-AF65-F5344CB8AC3E}">
-        <p14:creationId xmlns:p14="http://schemas.microsoft.com/office/powerpoint/2010/main" val="3754704184"/>
-      </p:ext>
-    </p:extLst>
   </p:cSld>
   <p:clrMapOvr>
     <a:masterClrMapping/>
   </p:clrMapOvr>
-  <mc:AlternateContent xmlns:mc="http://schemas.openxmlformats.org/markup-compatibility/2006" xmlns:p14="http://schemas.microsoft.com/office/powerpoint/2010/main">
-    <mc:Choice Requires="p14">
+  <mc:AlternateContent xmlns:mc="http://schemas.openxmlformats.org/markup-compatibility/2006">
+    <mc:Choice xmlns:p14="http://schemas.microsoft.com/office/powerpoint/2010/main" Requires="p14">
       <p:transition spd="slow" p14:dur="2000"/>
     </mc:Choice>
-    <mc:Fallback xmlns="">
+    <mc:Fallback>
       <p:transition spd="slow"/>
     </mc:Fallback>
   </mc:AlternateContent>
@@ -1736,8 +1680,6 @@
           <a:p>
             <a:fld id="{A9DF6EFB-3F44-496C-A842-1E0B3D3B975A}" type="datetimeFigureOut">
               <a:rPr lang="en-US" smtClean="0"/>
-              <a:pPr/>
-              <a:t>9/9/2025</a:t>
             </a:fld>
             <a:endParaRPr lang="en-US" dirty="0"/>
           </a:p>
@@ -1760,28 +1702,21 @@
           <a:p>
             <a:fld id="{200B2350-5261-4F5C-9DF5-EF0D264FC8D2}" type="slidenum">
               <a:rPr lang="en-US" smtClean="0"/>
-              <a:pPr/>
-              <a:t>‹#›</a:t>
             </a:fld>
             <a:endParaRPr lang="en-US" dirty="0"/>
           </a:p>
         </p:txBody>
       </p:sp>
     </p:spTree>
-    <p:extLst>
-      <p:ext uri="{BB962C8B-B14F-4D97-AF65-F5344CB8AC3E}">
-        <p14:creationId xmlns:p14="http://schemas.microsoft.com/office/powerpoint/2010/main" val="1855126593"/>
-      </p:ext>
-    </p:extLst>
   </p:cSld>
   <p:clrMapOvr>
     <a:masterClrMapping/>
   </p:clrMapOvr>
-  <mc:AlternateContent xmlns:mc="http://schemas.openxmlformats.org/markup-compatibility/2006" xmlns:p14="http://schemas.microsoft.com/office/powerpoint/2010/main">
-    <mc:Choice Requires="p14">
+  <mc:AlternateContent xmlns:mc="http://schemas.openxmlformats.org/markup-compatibility/2006">
+    <mc:Choice xmlns:p14="http://schemas.microsoft.com/office/powerpoint/2010/main" Requires="p14">
       <p:transition spd="slow" p14:dur="2000"/>
     </mc:Choice>
-    <mc:Fallback xmlns="">
+    <mc:Fallback>
       <p:transition spd="slow"/>
     </mc:Fallback>
   </mc:AlternateContent>
@@ -1796,7 +1731,7 @@
 </file>
 
 <file path=ppt/slideLayouts/slideLayout12.xml><?xml version="1.0" encoding="utf-8"?>
-<p:sldLayout xmlns:a="http://schemas.openxmlformats.org/drawingml/2006/main" xmlns:r="http://schemas.openxmlformats.org/officeDocument/2006/relationships" xmlns:p="http://schemas.openxmlformats.org/presentationml/2006/main" showMasterSp="0" preserve="1" userDrawn="1">
+<p:sldLayout xmlns:a="http://schemas.openxmlformats.org/drawingml/2006/main" xmlns:r="http://schemas.openxmlformats.org/officeDocument/2006/relationships" xmlns:p="http://schemas.openxmlformats.org/presentationml/2006/main" preserve="1" showMasterSp="0" userDrawn="1">
   <p:cSld name="Blank">
     <p:spTree>
       <p:nvGrpSpPr>
@@ -1861,8 +1796,6 @@
           <a:p>
             <a:fld id="{A9DF6EFB-3F44-496C-A842-1E0B3D3B975A}" type="datetimeFigureOut">
               <a:rPr lang="en-US" smtClean="0"/>
-              <a:pPr/>
-              <a:t>9/9/2025</a:t>
             </a:fld>
             <a:endParaRPr lang="en-US" dirty="0"/>
           </a:p>
@@ -1893,8 +1826,6 @@
           <a:p>
             <a:fld id="{200B2350-5261-4F5C-9DF5-EF0D264FC8D2}" type="slidenum">
               <a:rPr lang="en-US" smtClean="0"/>
-              <a:pPr/>
-              <a:t>‹#›</a:t>
             </a:fld>
             <a:endParaRPr lang="en-US" dirty="0"/>
           </a:p>
@@ -1966,7 +1897,6 @@
               <a:buSzTx/>
               <a:buFontTx/>
               <a:buNone/>
-              <a:tabLst/>
               <a:defRPr/>
             </a:pPr>
             <a:r>
@@ -1993,24 +1923,24 @@
               </a:rPr>
               <a:t>Pearson Education, Inc. All Rights Reserved.</a:t>
             </a:r>
+            <a:endParaRPr lang="en-US" altLang="en-US" sz="1200" b="0" dirty="0" smtClean="0">
+              <a:latin typeface="Verdana" panose="020B0604030504040204" pitchFamily="34" charset="0"/>
+              <a:ea typeface="Verdana" panose="020B0604030504040204" pitchFamily="34" charset="0"/>
+              <a:cs typeface="Verdana" panose="020B0604030504040204" pitchFamily="34" charset="0"/>
+            </a:endParaRPr>
           </a:p>
         </p:txBody>
       </p:sp>
     </p:spTree>
-    <p:extLst>
-      <p:ext uri="{BB962C8B-B14F-4D97-AF65-F5344CB8AC3E}">
-        <p14:creationId xmlns:p14="http://schemas.microsoft.com/office/powerpoint/2010/main" val="3711136687"/>
-      </p:ext>
-    </p:extLst>
   </p:cSld>
   <p:clrMapOvr>
     <a:masterClrMapping/>
   </p:clrMapOvr>
-  <mc:AlternateContent xmlns:mc="http://schemas.openxmlformats.org/markup-compatibility/2006" xmlns:p14="http://schemas.microsoft.com/office/powerpoint/2010/main">
-    <mc:Choice Requires="p14">
+  <mc:AlternateContent xmlns:mc="http://schemas.openxmlformats.org/markup-compatibility/2006">
+    <mc:Choice xmlns:p14="http://schemas.microsoft.com/office/powerpoint/2010/main" Requires="p14">
       <p:transition spd="slow" p14:dur="2000"/>
     </mc:Choice>
-    <mc:Fallback xmlns="">
+    <mc:Fallback>
       <p:transition spd="slow"/>
     </mc:Fallback>
   </mc:AlternateContent>
@@ -2065,6 +1995,7 @@
               <a:rPr lang="en-US" dirty="0"/>
               <a:t>Click to edit Master title style</a:t>
             </a:r>
+            <a:endParaRPr lang="en-US" dirty="0"/>
           </a:p>
         </p:txBody>
       </p:sp>
@@ -2195,6 +2126,7 @@
               <a:rPr lang="en-US" dirty="0"/>
               <a:t>Add edition here</a:t>
             </a:r>
+            <a:endParaRPr lang="en-US" dirty="0"/>
           </a:p>
         </p:txBody>
       </p:sp>
@@ -2289,6 +2221,7 @@
               <a:rPr lang="en-US" dirty="0"/>
               <a:t>Chapter ##</a:t>
             </a:r>
+            <a:endParaRPr lang="en-US" dirty="0"/>
           </a:p>
         </p:txBody>
       </p:sp>
@@ -2383,6 +2316,7 @@
               <a:rPr lang="en-US" dirty="0"/>
               <a:t>Chapter title</a:t>
             </a:r>
+            <a:endParaRPr lang="en-US" dirty="0"/>
           </a:p>
         </p:txBody>
       </p:sp>
@@ -2427,8 +2361,6 @@
           <a:p>
             <a:fld id="{A9DF6EFB-3F44-496C-A842-1E0B3D3B975A}" type="datetimeFigureOut">
               <a:rPr lang="en-US" smtClean="0"/>
-              <a:pPr/>
-              <a:t>9/9/2025</a:t>
             </a:fld>
             <a:endParaRPr lang="en-US" dirty="0"/>
           </a:p>
@@ -2451,8 +2383,6 @@
           <a:p>
             <a:fld id="{200B2350-5261-4F5C-9DF5-EF0D264FC8D2}" type="slidenum">
               <a:rPr lang="en-US" smtClean="0"/>
-              <a:pPr/>
-              <a:t>‹#›</a:t>
             </a:fld>
             <a:endParaRPr lang="en-US" dirty="0"/>
           </a:p>
@@ -2524,7 +2454,6 @@
               <a:buSzTx/>
               <a:buFontTx/>
               <a:buNone/>
-              <a:tabLst/>
               <a:defRPr/>
             </a:pPr>
             <a:r>
@@ -2551,24 +2480,32 @@
               </a:rPr>
               <a:t>Pearson Education, Ltd. All Rights Reserved.</a:t>
             </a:r>
+            <a:endParaRPr lang="en-US" altLang="en-US" sz="1200" b="0" dirty="0" smtClean="0">
+              <a:latin typeface="Verdana" panose="020B0604030504040204" pitchFamily="34" charset="0"/>
+              <a:ea typeface="Verdana" panose="020B0604030504040204" pitchFamily="34" charset="0"/>
+              <a:cs typeface="Verdana" panose="020B0604030504040204" pitchFamily="34" charset="0"/>
+            </a:endParaRPr>
           </a:p>
         </p:txBody>
       </p:sp>
     </p:spTree>
-    <p:extLst>
-      <p:ext uri="{BB962C8B-B14F-4D97-AF65-F5344CB8AC3E}">
-        <p14:creationId xmlns:p14="http://schemas.microsoft.com/office/powerpoint/2010/main" val="1131957916"/>
-      </p:ext>
-    </p:extLst>
   </p:cSld>
   <p:clrMapOvr>
     <a:masterClrMapping/>
   </p:clrMapOvr>
+  <mc:AlternateContent xmlns:mc="http://schemas.openxmlformats.org/markup-compatibility/2006">
+    <mc:Choice xmlns:p14="http://schemas.microsoft.com/office/powerpoint/2010/main" Requires="p14">
+      <p:transition spd="slow" p14:dur="2000"/>
+    </mc:Choice>
+    <mc:Fallback>
+      <p:transition spd="slow"/>
+    </mc:Fallback>
+  </mc:AlternateContent>
 </p:sldLayout>
 </file>
 
 <file path=ppt/slideLayouts/slideLayout2.xml><?xml version="1.0" encoding="utf-8"?>
-<p:sldLayout xmlns:a="http://schemas.openxmlformats.org/drawingml/2006/main" xmlns:r="http://schemas.openxmlformats.org/officeDocument/2006/relationships" xmlns:p="http://schemas.openxmlformats.org/presentationml/2006/main" showMasterSp="0" preserve="1" userDrawn="1">
+<p:sldLayout xmlns:a="http://schemas.openxmlformats.org/drawingml/2006/main" xmlns:r="http://schemas.openxmlformats.org/officeDocument/2006/relationships" xmlns:p="http://schemas.openxmlformats.org/presentationml/2006/main" preserve="1" showMasterSp="0" userDrawn="1">
   <p:cSld name="Chapter Opener">
     <p:spTree>
       <p:nvGrpSpPr>
@@ -2964,20 +2901,15 @@
         </p:spPr>
       </p:pic>
     </p:spTree>
-    <p:extLst>
-      <p:ext uri="{BB962C8B-B14F-4D97-AF65-F5344CB8AC3E}">
-        <p14:creationId xmlns:p14="http://schemas.microsoft.com/office/powerpoint/2010/main" val="2981062836"/>
-      </p:ext>
-    </p:extLst>
   </p:cSld>
   <p:clrMapOvr>
     <a:masterClrMapping/>
   </p:clrMapOvr>
-  <mc:AlternateContent xmlns:mc="http://schemas.openxmlformats.org/markup-compatibility/2006" xmlns:p14="http://schemas.microsoft.com/office/powerpoint/2010/main">
-    <mc:Choice Requires="p14">
+  <mc:AlternateContent xmlns:mc="http://schemas.openxmlformats.org/markup-compatibility/2006">
+    <mc:Choice xmlns:p14="http://schemas.microsoft.com/office/powerpoint/2010/main" Requires="p14">
       <p:transition spd="slow" p14:dur="2000"/>
     </mc:Choice>
-    <mc:Fallback xmlns="">
+    <mc:Fallback>
       <p:transition spd="slow"/>
     </mc:Fallback>
   </mc:AlternateContent>
@@ -3068,8 +3000,6 @@
           <a:p>
             <a:fld id="{A9DF6EFB-3F44-496C-A842-1E0B3D3B975A}" type="datetimeFigureOut">
               <a:rPr lang="en-US" smtClean="0"/>
-              <a:pPr/>
-              <a:t>9/9/2025</a:t>
             </a:fld>
             <a:endParaRPr lang="en-US" dirty="0"/>
           </a:p>
@@ -3092,8 +3022,6 @@
           <a:p>
             <a:fld id="{200B2350-5261-4F5C-9DF5-EF0D264FC8D2}" type="slidenum">
               <a:rPr lang="en-US" smtClean="0"/>
-              <a:pPr/>
-              <a:t>‹#›</a:t>
             </a:fld>
             <a:endParaRPr lang="en-US" dirty="0"/>
           </a:p>
@@ -3104,11 +3032,11 @@
   <p:clrMapOvr>
     <a:masterClrMapping/>
   </p:clrMapOvr>
-  <mc:AlternateContent xmlns:mc="http://schemas.openxmlformats.org/markup-compatibility/2006" xmlns:p14="http://schemas.microsoft.com/office/powerpoint/2010/main">
-    <mc:Choice Requires="p14">
+  <mc:AlternateContent xmlns:mc="http://schemas.openxmlformats.org/markup-compatibility/2006">
+    <mc:Choice xmlns:p14="http://schemas.microsoft.com/office/powerpoint/2010/main" Requires="p14">
       <p:transition spd="slow" p14:dur="2000"/>
     </mc:Choice>
-    <mc:Fallback xmlns="">
+    <mc:Fallback>
       <p:transition spd="slow"/>
     </mc:Fallback>
   </mc:AlternateContent>
@@ -3332,6 +3260,7 @@
               <a:rPr lang="en-US" dirty="0" smtClean="0"/>
               <a:t>Click to edit Master text styles</a:t>
             </a:r>
+            <a:endParaRPr lang="en-US" dirty="0" smtClean="0"/>
           </a:p>
           <a:p>
             <a:pPr lvl="1"/>
@@ -3339,6 +3268,7 @@
               <a:rPr lang="en-US" dirty="0" smtClean="0"/>
               <a:t>Second level</a:t>
             </a:r>
+            <a:endParaRPr lang="en-US" dirty="0" smtClean="0"/>
           </a:p>
           <a:p>
             <a:pPr lvl="2"/>
@@ -3346,6 +3276,7 @@
               <a:rPr lang="en-US" dirty="0" smtClean="0"/>
               <a:t>Third level</a:t>
             </a:r>
+            <a:endParaRPr lang="en-US" dirty="0" smtClean="0"/>
           </a:p>
           <a:p>
             <a:pPr lvl="3"/>
@@ -3353,6 +3284,7 @@
               <a:rPr lang="en-US" dirty="0" smtClean="0"/>
               <a:t>Fourth level</a:t>
             </a:r>
+            <a:endParaRPr lang="en-US" dirty="0" smtClean="0"/>
           </a:p>
           <a:p>
             <a:pPr lvl="4"/>
@@ -3360,6 +3292,7 @@
               <a:rPr lang="en-US" dirty="0" smtClean="0"/>
               <a:t>Fifth level</a:t>
             </a:r>
+            <a:endParaRPr lang="en-US" dirty="0" smtClean="0"/>
           </a:p>
           <a:p>
             <a:pPr lvl="5"/>
@@ -3367,6 +3300,7 @@
               <a:rPr lang="en-US" dirty="0" smtClean="0"/>
               <a:t>Sixth</a:t>
             </a:r>
+            <a:endParaRPr lang="en-US" dirty="0" smtClean="0"/>
           </a:p>
           <a:p>
             <a:pPr lvl="6"/>
@@ -3374,6 +3308,7 @@
               <a:rPr lang="en-US" dirty="0" smtClean="0"/>
               <a:t>Seventh</a:t>
             </a:r>
+            <a:endParaRPr lang="en-US" dirty="0" smtClean="0"/>
           </a:p>
           <a:p>
             <a:pPr lvl="7"/>
@@ -3381,6 +3316,7 @@
               <a:rPr lang="en-US" dirty="0" smtClean="0"/>
               <a:t>Eighth</a:t>
             </a:r>
+            <a:endParaRPr lang="en-US" dirty="0" smtClean="0"/>
           </a:p>
           <a:p>
             <a:pPr lvl="8"/>
@@ -3433,8 +3369,6 @@
           <a:p>
             <a:fld id="{A9DF6EFB-3F44-496C-A842-1E0B3D3B975A}" type="datetimeFigureOut">
               <a:rPr lang="en-US" smtClean="0"/>
-              <a:pPr/>
-              <a:t>9/9/2025</a:t>
             </a:fld>
             <a:endParaRPr lang="en-US" dirty="0"/>
           </a:p>
@@ -3457,28 +3391,21 @@
           <a:p>
             <a:fld id="{200B2350-5261-4F5C-9DF5-EF0D264FC8D2}" type="slidenum">
               <a:rPr lang="en-US" smtClean="0"/>
-              <a:pPr/>
-              <a:t>‹#›</a:t>
             </a:fld>
             <a:endParaRPr lang="en-US" dirty="0"/>
           </a:p>
         </p:txBody>
       </p:sp>
     </p:spTree>
-    <p:extLst>
-      <p:ext uri="{BB962C8B-B14F-4D97-AF65-F5344CB8AC3E}">
-        <p14:creationId xmlns:p14="http://schemas.microsoft.com/office/powerpoint/2010/main" val="1152463018"/>
-      </p:ext>
-    </p:extLst>
   </p:cSld>
   <p:clrMapOvr>
     <a:masterClrMapping/>
   </p:clrMapOvr>
-  <mc:AlternateContent xmlns:mc="http://schemas.openxmlformats.org/markup-compatibility/2006" xmlns:p14="http://schemas.microsoft.com/office/powerpoint/2010/main">
-    <mc:Choice Requires="p14">
+  <mc:AlternateContent xmlns:mc="http://schemas.openxmlformats.org/markup-compatibility/2006">
+    <mc:Choice xmlns:p14="http://schemas.microsoft.com/office/powerpoint/2010/main" Requires="p14">
       <p:transition spd="slow" p14:dur="2000"/>
     </mc:Choice>
-    <mc:Fallback xmlns="">
+    <mc:Fallback>
       <p:transition spd="slow"/>
     </mc:Fallback>
   </mc:AlternateContent>
@@ -3608,6 +3535,7 @@
               <a:rPr lang="en-US" dirty="0" smtClean="0"/>
               <a:t>Click to edit Master text styles</a:t>
             </a:r>
+            <a:endParaRPr lang="en-US" dirty="0" smtClean="0"/>
           </a:p>
           <a:p>
             <a:pPr lvl="1"/>
@@ -3615,6 +3543,7 @@
               <a:rPr lang="en-US" dirty="0" smtClean="0"/>
               <a:t>Second level</a:t>
             </a:r>
+            <a:endParaRPr lang="en-US" dirty="0" smtClean="0"/>
           </a:p>
           <a:p>
             <a:pPr lvl="2"/>
@@ -3622,6 +3551,7 @@
               <a:rPr lang="en-US" dirty="0" smtClean="0"/>
               <a:t>Third level</a:t>
             </a:r>
+            <a:endParaRPr lang="en-US" dirty="0" smtClean="0"/>
           </a:p>
           <a:p>
             <a:pPr lvl="3"/>
@@ -3629,6 +3559,7 @@
               <a:rPr lang="en-US" dirty="0" smtClean="0"/>
               <a:t>Fourth level</a:t>
             </a:r>
+            <a:endParaRPr lang="en-US" dirty="0" smtClean="0"/>
           </a:p>
           <a:p>
             <a:pPr lvl="4"/>
@@ -3636,6 +3567,7 @@
               <a:rPr lang="en-US" dirty="0" smtClean="0"/>
               <a:t>Fifth level</a:t>
             </a:r>
+            <a:endParaRPr lang="en-US" dirty="0" smtClean="0"/>
           </a:p>
           <a:p>
             <a:pPr lvl="5"/>
@@ -3643,6 +3575,7 @@
               <a:rPr lang="en-US" dirty="0" smtClean="0"/>
               <a:t>Sixth</a:t>
             </a:r>
+            <a:endParaRPr lang="en-US" dirty="0" smtClean="0"/>
           </a:p>
           <a:p>
             <a:pPr lvl="6"/>
@@ -3650,6 +3583,7 @@
               <a:rPr lang="en-US" dirty="0" smtClean="0"/>
               <a:t>Seventh</a:t>
             </a:r>
+            <a:endParaRPr lang="en-US" dirty="0" smtClean="0"/>
           </a:p>
           <a:p>
             <a:pPr lvl="7"/>
@@ -3657,6 +3591,7 @@
               <a:rPr lang="en-US" dirty="0" smtClean="0"/>
               <a:t>Eighth</a:t>
             </a:r>
+            <a:endParaRPr lang="en-US" dirty="0" smtClean="0"/>
           </a:p>
           <a:p>
             <a:pPr lvl="8"/>
@@ -3714,8 +3649,6 @@
           <a:p>
             <a:fld id="{A9DF6EFB-3F44-496C-A842-1E0B3D3B975A}" type="datetimeFigureOut">
               <a:rPr lang="en-US" smtClean="0"/>
-              <a:pPr/>
-              <a:t>9/9/2025</a:t>
             </a:fld>
             <a:endParaRPr lang="en-US" dirty="0"/>
           </a:p>
@@ -3743,28 +3676,21 @@
           <a:p>
             <a:fld id="{200B2350-5261-4F5C-9DF5-EF0D264FC8D2}" type="slidenum">
               <a:rPr lang="en-US" smtClean="0"/>
-              <a:pPr/>
-              <a:t>‹#›</a:t>
             </a:fld>
             <a:endParaRPr lang="en-US" dirty="0"/>
           </a:p>
         </p:txBody>
       </p:sp>
     </p:spTree>
-    <p:extLst>
-      <p:ext uri="{BB962C8B-B14F-4D97-AF65-F5344CB8AC3E}">
-        <p14:creationId xmlns:p14="http://schemas.microsoft.com/office/powerpoint/2010/main" val="1210909346"/>
-      </p:ext>
-    </p:extLst>
   </p:cSld>
   <p:clrMapOvr>
     <a:masterClrMapping/>
   </p:clrMapOvr>
-  <mc:AlternateContent xmlns:mc="http://schemas.openxmlformats.org/markup-compatibility/2006" xmlns:p14="http://schemas.microsoft.com/office/powerpoint/2010/main">
-    <mc:Choice Requires="p14">
+  <mc:AlternateContent xmlns:mc="http://schemas.openxmlformats.org/markup-compatibility/2006">
+    <mc:Choice xmlns:p14="http://schemas.microsoft.com/office/powerpoint/2010/main" Requires="p14">
       <p:transition spd="slow" p14:dur="2000"/>
     </mc:Choice>
-    <mc:Fallback xmlns="">
+    <mc:Fallback>
       <p:transition spd="slow"/>
     </mc:Fallback>
   </mc:AlternateContent>
@@ -3832,14 +3758,14 @@
         <p:txBody>
           <a:bodyPr/>
           <a:lstStyle>
-            <a:lvl1pPr marL="118872" indent="-118872">
+            <a:lvl1pPr marL="118745" indent="-118745">
               <a:buClr>
                 <a:srgbClr val="007FA3"/>
               </a:buClr>
               <a:buSzPct val="25000"/>
               <a:defRPr sz="1600"/>
             </a:lvl1pPr>
-            <a:lvl2pPr marL="569913" indent="-285750">
+            <a:lvl2pPr marL="570230" indent="-285750">
               <a:buClr>
                 <a:srgbClr val="007FA3"/>
               </a:buClr>
@@ -3894,6 +3820,7 @@
               <a:rPr lang="en-US" dirty="0" smtClean="0"/>
               <a:t>Click to edit Master text styles</a:t>
             </a:r>
+            <a:endParaRPr lang="en-US" dirty="0" smtClean="0"/>
           </a:p>
           <a:p>
             <a:pPr lvl="1"/>
@@ -3901,6 +3828,7 @@
               <a:rPr lang="en-US" dirty="0" smtClean="0"/>
               <a:t>Second level</a:t>
             </a:r>
+            <a:endParaRPr lang="en-US" dirty="0" smtClean="0"/>
           </a:p>
           <a:p>
             <a:pPr lvl="2"/>
@@ -3908,6 +3836,7 @@
               <a:rPr lang="en-US" dirty="0" smtClean="0"/>
               <a:t>Third level</a:t>
             </a:r>
+            <a:endParaRPr lang="en-US" dirty="0" smtClean="0"/>
           </a:p>
           <a:p>
             <a:pPr lvl="3"/>
@@ -3915,6 +3844,7 @@
               <a:rPr lang="en-US" dirty="0" smtClean="0"/>
               <a:t>Fourth level</a:t>
             </a:r>
+            <a:endParaRPr lang="en-US" dirty="0" smtClean="0"/>
           </a:p>
           <a:p>
             <a:pPr lvl="4"/>
@@ -3922,6 +3852,7 @@
               <a:rPr lang="en-US" dirty="0" smtClean="0"/>
               <a:t>Fifth level</a:t>
             </a:r>
+            <a:endParaRPr lang="en-US" dirty="0" smtClean="0"/>
           </a:p>
           <a:p>
             <a:pPr lvl="5"/>
@@ -3929,6 +3860,7 @@
               <a:rPr lang="en-US" dirty="0" smtClean="0"/>
               <a:t>Sixth</a:t>
             </a:r>
+            <a:endParaRPr lang="en-US" dirty="0" smtClean="0"/>
           </a:p>
           <a:p>
             <a:pPr lvl="6"/>
@@ -3936,6 +3868,7 @@
               <a:rPr lang="en-US" dirty="0" smtClean="0"/>
               <a:t>Seventh</a:t>
             </a:r>
+            <a:endParaRPr lang="en-US" dirty="0" smtClean="0"/>
           </a:p>
           <a:p>
             <a:pPr lvl="7"/>
@@ -3943,6 +3876,7 @@
               <a:rPr lang="en-US" dirty="0" smtClean="0"/>
               <a:t>Eighth</a:t>
             </a:r>
+            <a:endParaRPr lang="en-US" dirty="0" smtClean="0"/>
           </a:p>
           <a:p>
             <a:pPr lvl="8"/>
@@ -3995,8 +3929,6 @@
           <a:p>
             <a:fld id="{A9DF6EFB-3F44-496C-A842-1E0B3D3B975A}" type="datetimeFigureOut">
               <a:rPr lang="en-US" smtClean="0"/>
-              <a:pPr/>
-              <a:t>9/9/2025</a:t>
             </a:fld>
             <a:endParaRPr lang="en-US" dirty="0"/>
           </a:p>
@@ -4019,28 +3951,21 @@
           <a:p>
             <a:fld id="{200B2350-5261-4F5C-9DF5-EF0D264FC8D2}" type="slidenum">
               <a:rPr lang="en-US" smtClean="0"/>
-              <a:pPr/>
-              <a:t>‹#›</a:t>
             </a:fld>
             <a:endParaRPr lang="en-US" dirty="0"/>
           </a:p>
         </p:txBody>
       </p:sp>
     </p:spTree>
-    <p:extLst>
-      <p:ext uri="{BB962C8B-B14F-4D97-AF65-F5344CB8AC3E}">
-        <p14:creationId xmlns:p14="http://schemas.microsoft.com/office/powerpoint/2010/main" val="275200838"/>
-      </p:ext>
-    </p:extLst>
   </p:cSld>
   <p:clrMapOvr>
     <a:masterClrMapping/>
   </p:clrMapOvr>
-  <mc:AlternateContent xmlns:mc="http://schemas.openxmlformats.org/markup-compatibility/2006" xmlns:p14="http://schemas.microsoft.com/office/powerpoint/2010/main">
-    <mc:Choice Requires="p14">
+  <mc:AlternateContent xmlns:mc="http://schemas.openxmlformats.org/markup-compatibility/2006">
+    <mc:Choice xmlns:p14="http://schemas.microsoft.com/office/powerpoint/2010/main" Requires="p14">
       <p:transition spd="slow" p14:dur="2000"/>
     </mc:Choice>
-    <mc:Fallback xmlns="">
+    <mc:Fallback>
       <p:transition spd="slow"/>
     </mc:Fallback>
   </mc:AlternateContent>
@@ -4055,7 +3980,7 @@
 </file>
 
 <file path=ppt/slideLayouts/slideLayout7.xml><?xml version="1.0" encoding="utf-8"?>
-<p:sldLayout xmlns:a="http://schemas.openxmlformats.org/drawingml/2006/main" xmlns:r="http://schemas.openxmlformats.org/officeDocument/2006/relationships" xmlns:p="http://schemas.openxmlformats.org/presentationml/2006/main" showMasterSp="0" preserve="1" userDrawn="1">
+<p:sldLayout xmlns:a="http://schemas.openxmlformats.org/drawingml/2006/main" xmlns:r="http://schemas.openxmlformats.org/officeDocument/2006/relationships" xmlns:p="http://schemas.openxmlformats.org/presentationml/2006/main" preserve="1" showMasterSp="0" userDrawn="1">
   <p:cSld name="Figure + Caption">
     <p:spTree>
       <p:nvGrpSpPr>
@@ -4249,8 +4174,6 @@
           <a:p>
             <a:fld id="{A9DF6EFB-3F44-496C-A842-1E0B3D3B975A}" type="datetimeFigureOut">
               <a:rPr lang="en-US" smtClean="0"/>
-              <a:pPr/>
-              <a:t>9/9/2025</a:t>
             </a:fld>
             <a:endParaRPr lang="en-US" dirty="0"/>
           </a:p>
@@ -4281,8 +4204,6 @@
           <a:p>
             <a:fld id="{200B2350-5261-4F5C-9DF5-EF0D264FC8D2}" type="slidenum">
               <a:rPr lang="en-US" smtClean="0"/>
-              <a:pPr/>
-              <a:t>‹#›</a:t>
             </a:fld>
             <a:endParaRPr lang="en-US" dirty="0"/>
           </a:p>
@@ -4354,7 +4275,6 @@
               <a:buSzTx/>
               <a:buFontTx/>
               <a:buNone/>
-              <a:tabLst/>
               <a:defRPr/>
             </a:pPr>
             <a:r>
@@ -4381,24 +4301,24 @@
               </a:rPr>
               <a:t>Pearson Education, Inc. All Rights Reserved.</a:t>
             </a:r>
+            <a:endParaRPr lang="en-US" altLang="en-US" sz="1200" b="0" dirty="0" smtClean="0">
+              <a:latin typeface="Verdana" panose="020B0604030504040204" pitchFamily="34" charset="0"/>
+              <a:ea typeface="Verdana" panose="020B0604030504040204" pitchFamily="34" charset="0"/>
+              <a:cs typeface="Verdana" panose="020B0604030504040204" pitchFamily="34" charset="0"/>
+            </a:endParaRPr>
           </a:p>
         </p:txBody>
       </p:sp>
     </p:spTree>
-    <p:extLst>
-      <p:ext uri="{BB962C8B-B14F-4D97-AF65-F5344CB8AC3E}">
-        <p14:creationId xmlns:p14="http://schemas.microsoft.com/office/powerpoint/2010/main" val="2203796096"/>
-      </p:ext>
-    </p:extLst>
   </p:cSld>
   <p:clrMapOvr>
     <a:masterClrMapping/>
   </p:clrMapOvr>
-  <mc:AlternateContent xmlns:mc="http://schemas.openxmlformats.org/markup-compatibility/2006" xmlns:p14="http://schemas.microsoft.com/office/powerpoint/2010/main">
-    <mc:Choice Requires="p14">
+  <mc:AlternateContent xmlns:mc="http://schemas.openxmlformats.org/markup-compatibility/2006">
+    <mc:Choice xmlns:p14="http://schemas.microsoft.com/office/powerpoint/2010/main" Requires="p14">
       <p:transition spd="slow" p14:dur="2000"/>
     </mc:Choice>
-    <mc:Fallback xmlns="">
+    <mc:Fallback>
       <p:transition spd="slow"/>
     </mc:Fallback>
   </mc:AlternateContent>
@@ -4505,6 +4425,7 @@
               <a:rPr lang="en-US" dirty="0" smtClean="0"/>
               <a:t>Click to edit Master text styles</a:t>
             </a:r>
+            <a:endParaRPr lang="en-US" dirty="0" smtClean="0"/>
           </a:p>
           <a:p>
             <a:pPr lvl="1"/>
@@ -4512,6 +4433,7 @@
               <a:rPr lang="en-US" dirty="0" smtClean="0"/>
               <a:t>Second level</a:t>
             </a:r>
+            <a:endParaRPr lang="en-US" dirty="0" smtClean="0"/>
           </a:p>
           <a:p>
             <a:pPr lvl="2"/>
@@ -4519,6 +4441,7 @@
               <a:rPr lang="en-US" dirty="0" smtClean="0"/>
               <a:t>Third level</a:t>
             </a:r>
+            <a:endParaRPr lang="en-US" dirty="0" smtClean="0"/>
           </a:p>
           <a:p>
             <a:pPr lvl="3"/>
@@ -4526,6 +4449,7 @@
               <a:rPr lang="en-US" dirty="0" smtClean="0"/>
               <a:t>Fourth level</a:t>
             </a:r>
+            <a:endParaRPr lang="en-US" dirty="0" smtClean="0"/>
           </a:p>
           <a:p>
             <a:pPr lvl="4"/>
@@ -4590,6 +4514,7 @@
               <a:rPr lang="en-US" dirty="0" smtClean="0"/>
               <a:t>Click to edit Master text styles</a:t>
             </a:r>
+            <a:endParaRPr lang="en-US" dirty="0" smtClean="0"/>
           </a:p>
           <a:p>
             <a:pPr lvl="1"/>
@@ -4597,6 +4522,7 @@
               <a:rPr lang="en-US" dirty="0" smtClean="0"/>
               <a:t>Second level</a:t>
             </a:r>
+            <a:endParaRPr lang="en-US" dirty="0" smtClean="0"/>
           </a:p>
           <a:p>
             <a:pPr lvl="2"/>
@@ -4604,6 +4530,7 @@
               <a:rPr lang="en-US" dirty="0" smtClean="0"/>
               <a:t>Third level</a:t>
             </a:r>
+            <a:endParaRPr lang="en-US" dirty="0" smtClean="0"/>
           </a:p>
           <a:p>
             <a:pPr lvl="3"/>
@@ -4611,6 +4538,7 @@
               <a:rPr lang="en-US" dirty="0" smtClean="0"/>
               <a:t>Fourth level</a:t>
             </a:r>
+            <a:endParaRPr lang="en-US" dirty="0" smtClean="0"/>
           </a:p>
           <a:p>
             <a:pPr lvl="4"/>
@@ -4663,8 +4591,6 @@
           <a:p>
             <a:fld id="{A9DF6EFB-3F44-496C-A842-1E0B3D3B975A}" type="datetimeFigureOut">
               <a:rPr lang="en-US" smtClean="0"/>
-              <a:pPr/>
-              <a:t>9/9/2025</a:t>
             </a:fld>
             <a:endParaRPr lang="en-US" dirty="0"/>
           </a:p>
@@ -4687,28 +4613,21 @@
           <a:p>
             <a:fld id="{200B2350-5261-4F5C-9DF5-EF0D264FC8D2}" type="slidenum">
               <a:rPr lang="en-US" smtClean="0"/>
-              <a:pPr/>
-              <a:t>‹#›</a:t>
             </a:fld>
             <a:endParaRPr lang="en-US" dirty="0"/>
           </a:p>
         </p:txBody>
       </p:sp>
     </p:spTree>
-    <p:extLst>
-      <p:ext uri="{BB962C8B-B14F-4D97-AF65-F5344CB8AC3E}">
-        <p14:creationId xmlns:p14="http://schemas.microsoft.com/office/powerpoint/2010/main" val="3154799957"/>
-      </p:ext>
-    </p:extLst>
   </p:cSld>
   <p:clrMapOvr>
     <a:masterClrMapping/>
   </p:clrMapOvr>
-  <mc:AlternateContent xmlns:mc="http://schemas.openxmlformats.org/markup-compatibility/2006" xmlns:p14="http://schemas.microsoft.com/office/powerpoint/2010/main">
-    <mc:Choice Requires="p14">
+  <mc:AlternateContent xmlns:mc="http://schemas.openxmlformats.org/markup-compatibility/2006">
+    <mc:Choice xmlns:p14="http://schemas.microsoft.com/office/powerpoint/2010/main" Requires="p14">
       <p:transition spd="slow" p14:dur="2000"/>
     </mc:Choice>
-    <mc:Fallback xmlns="">
+    <mc:Fallback>
       <p:transition spd="slow"/>
     </mc:Fallback>
   </mc:AlternateContent>
@@ -4775,8 +4694,6 @@
           <a:p>
             <a:fld id="{A9DF6EFB-3F44-496C-A842-1E0B3D3B975A}" type="datetimeFigureOut">
               <a:rPr lang="en-US" smtClean="0"/>
-              <a:pPr/>
-              <a:t>9/9/2025</a:t>
             </a:fld>
             <a:endParaRPr lang="en-US" dirty="0"/>
           </a:p>
@@ -4799,8 +4716,6 @@
           <a:p>
             <a:fld id="{200B2350-5261-4F5C-9DF5-EF0D264FC8D2}" type="slidenum">
               <a:rPr lang="en-US" smtClean="0"/>
-              <a:pPr/>
-              <a:t>‹#›</a:t>
             </a:fld>
             <a:endParaRPr lang="en-US" dirty="0"/>
           </a:p>
@@ -4887,6 +4802,7 @@
               <a:rPr lang="en-US" dirty="0" smtClean="0"/>
               <a:t>Click to edit Master text styles</a:t>
             </a:r>
+            <a:endParaRPr lang="en-US" dirty="0" smtClean="0"/>
           </a:p>
           <a:p>
             <a:pPr lvl="1"/>
@@ -4894,6 +4810,7 @@
               <a:rPr lang="en-US" dirty="0" smtClean="0"/>
               <a:t>Second level</a:t>
             </a:r>
+            <a:endParaRPr lang="en-US" dirty="0" smtClean="0"/>
           </a:p>
           <a:p>
             <a:pPr lvl="2"/>
@@ -4901,6 +4818,7 @@
               <a:rPr lang="en-US" dirty="0" smtClean="0"/>
               <a:t>Third level</a:t>
             </a:r>
+            <a:endParaRPr lang="en-US" dirty="0" smtClean="0"/>
           </a:p>
           <a:p>
             <a:pPr lvl="3"/>
@@ -4908,6 +4826,7 @@
               <a:rPr lang="en-US" dirty="0" smtClean="0"/>
               <a:t>Fourth level</a:t>
             </a:r>
+            <a:endParaRPr lang="en-US" dirty="0" smtClean="0"/>
           </a:p>
           <a:p>
             <a:pPr lvl="4"/>
@@ -4972,6 +4891,7 @@
               <a:rPr lang="en-US" dirty="0" smtClean="0"/>
               <a:t>Click to edit Master text styles</a:t>
             </a:r>
+            <a:endParaRPr lang="en-US" dirty="0" smtClean="0"/>
           </a:p>
           <a:p>
             <a:pPr lvl="1"/>
@@ -4979,6 +4899,7 @@
               <a:rPr lang="en-US" dirty="0" smtClean="0"/>
               <a:t>Second level</a:t>
             </a:r>
+            <a:endParaRPr lang="en-US" dirty="0" smtClean="0"/>
           </a:p>
           <a:p>
             <a:pPr lvl="2"/>
@@ -4986,6 +4907,7 @@
               <a:rPr lang="en-US" dirty="0" smtClean="0"/>
               <a:t>Third level</a:t>
             </a:r>
+            <a:endParaRPr lang="en-US" dirty="0" smtClean="0"/>
           </a:p>
           <a:p>
             <a:pPr lvl="3"/>
@@ -4993,6 +4915,7 @@
               <a:rPr lang="en-US" dirty="0" smtClean="0"/>
               <a:t>Fourth level</a:t>
             </a:r>
+            <a:endParaRPr lang="en-US" dirty="0" smtClean="0"/>
           </a:p>
           <a:p>
             <a:pPr lvl="4"/>
@@ -5029,6 +4952,7 @@
               <a:rPr lang="en-US" dirty="0" smtClean="0"/>
               <a:t>Click to edit Master text styles</a:t>
             </a:r>
+            <a:endParaRPr lang="en-US" dirty="0" smtClean="0"/>
           </a:p>
           <a:p>
             <a:pPr lvl="1"/>
@@ -5036,6 +4960,7 @@
               <a:rPr lang="en-US" dirty="0" smtClean="0"/>
               <a:t>Second level</a:t>
             </a:r>
+            <a:endParaRPr lang="en-US" dirty="0" smtClean="0"/>
           </a:p>
           <a:p>
             <a:pPr lvl="2"/>
@@ -5043,6 +4968,7 @@
               <a:rPr lang="en-US" dirty="0" smtClean="0"/>
               <a:t>Third level</a:t>
             </a:r>
+            <a:endParaRPr lang="en-US" dirty="0" smtClean="0"/>
           </a:p>
           <a:p>
             <a:pPr lvl="3"/>
@@ -5050,6 +4976,7 @@
               <a:rPr lang="en-US" dirty="0" smtClean="0"/>
               <a:t>Fourth level</a:t>
             </a:r>
+            <a:endParaRPr lang="en-US" dirty="0" smtClean="0"/>
           </a:p>
           <a:p>
             <a:pPr lvl="4"/>
@@ -5066,11 +4993,11 @@
   <p:clrMapOvr>
     <a:masterClrMapping/>
   </p:clrMapOvr>
-  <mc:AlternateContent xmlns:mc="http://schemas.openxmlformats.org/markup-compatibility/2006" xmlns:p14="http://schemas.microsoft.com/office/powerpoint/2010/main">
-    <mc:Choice Requires="p14">
+  <mc:AlternateContent xmlns:mc="http://schemas.openxmlformats.org/markup-compatibility/2006">
+    <mc:Choice xmlns:p14="http://schemas.microsoft.com/office/powerpoint/2010/main" Requires="p14">
       <p:transition spd="slow" p14:dur="2000"/>
     </mc:Choice>
-    <mc:Fallback xmlns="">
+    <mc:Fallback>
       <p:transition spd="slow"/>
     </mc:Fallback>
   </mc:AlternateContent>
@@ -5169,6 +5096,7 @@
               <a:rPr lang="en-US" dirty="0" smtClean="0"/>
               <a:t>Click to edit Master text styles</a:t>
             </a:r>
+            <a:endParaRPr lang="en-US" dirty="0" smtClean="0"/>
           </a:p>
           <a:p>
             <a:pPr lvl="1"/>
@@ -5176,6 +5104,7 @@
               <a:rPr lang="en-US" dirty="0" smtClean="0"/>
               <a:t>Second level</a:t>
             </a:r>
+            <a:endParaRPr lang="en-US" dirty="0" smtClean="0"/>
           </a:p>
           <a:p>
             <a:pPr lvl="2"/>
@@ -5183,6 +5112,7 @@
               <a:rPr lang="en-US" dirty="0" smtClean="0"/>
               <a:t>Third level</a:t>
             </a:r>
+            <a:endParaRPr lang="en-US" dirty="0" smtClean="0"/>
           </a:p>
           <a:p>
             <a:pPr lvl="3"/>
@@ -5190,6 +5120,7 @@
               <a:rPr lang="en-US" dirty="0" smtClean="0"/>
               <a:t>Fourth level</a:t>
             </a:r>
+            <a:endParaRPr lang="en-US" dirty="0" smtClean="0"/>
           </a:p>
           <a:p>
             <a:pPr lvl="4"/>
@@ -5197,6 +5128,7 @@
               <a:rPr lang="en-US" dirty="0" smtClean="0"/>
               <a:t>Fifth level</a:t>
             </a:r>
+            <a:endParaRPr lang="en-US" dirty="0" smtClean="0"/>
           </a:p>
           <a:p>
             <a:pPr lvl="5"/>
@@ -5204,6 +5136,7 @@
               <a:rPr lang="en-US" dirty="0" smtClean="0"/>
               <a:t>Sixth</a:t>
             </a:r>
+            <a:endParaRPr lang="en-US" dirty="0" smtClean="0"/>
           </a:p>
           <a:p>
             <a:pPr lvl="6"/>
@@ -5211,6 +5144,7 @@
               <a:rPr lang="en-US" dirty="0" smtClean="0"/>
               <a:t>Seventh</a:t>
             </a:r>
+            <a:endParaRPr lang="en-US" dirty="0" smtClean="0"/>
           </a:p>
           <a:p>
             <a:pPr lvl="7"/>
@@ -5218,6 +5152,7 @@
               <a:rPr lang="en-US" dirty="0" smtClean="0"/>
               <a:t>Eighth</a:t>
             </a:r>
+            <a:endParaRPr lang="en-US" dirty="0" smtClean="0"/>
           </a:p>
           <a:p>
             <a:pPr lvl="8"/>
@@ -5297,8 +5232,6 @@
           <a:p>
             <a:fld id="{A9DF6EFB-3F44-496C-A842-1E0B3D3B975A}" type="datetimeFigureOut">
               <a:rPr lang="en-US" smtClean="0"/>
-              <a:pPr/>
-              <a:t>9/9/2025</a:t>
             </a:fld>
             <a:endParaRPr lang="en-US" dirty="0"/>
           </a:p>
@@ -5337,8 +5270,6 @@
           <a:p>
             <a:fld id="{200B2350-5261-4F5C-9DF5-EF0D264FC8D2}" type="slidenum">
               <a:rPr lang="en-US" smtClean="0"/>
-              <a:pPr/>
-              <a:t>‹#›</a:t>
             </a:fld>
             <a:endParaRPr lang="en-US" dirty="0"/>
           </a:p>
@@ -5380,7 +5311,6 @@
               <a:buSzTx/>
               <a:buFontTx/>
               <a:buNone/>
-              <a:tabLst/>
               <a:defRPr/>
             </a:pPr>
             <a:r>
@@ -5407,6 +5337,11 @@
               </a:rPr>
               <a:t>Pearson Education, Ltd. All Rights Reserved.</a:t>
             </a:r>
+            <a:endParaRPr lang="en-US" altLang="en-US" sz="1200" b="0" dirty="0" smtClean="0">
+              <a:latin typeface="Verdana" panose="020B0604030504040204" pitchFamily="34" charset="0"/>
+              <a:ea typeface="Verdana" panose="020B0604030504040204" pitchFamily="34" charset="0"/>
+              <a:cs typeface="Verdana" panose="020B0604030504040204" pitchFamily="34" charset="0"/>
+            </a:endParaRPr>
           </a:p>
         </p:txBody>
       </p:sp>
@@ -5419,7 +5354,7 @@
           <p:nvPr userDrawn="1"/>
         </p:nvPicPr>
         <p:blipFill>
-          <a:blip r:embed="rId15" cstate="print">
+          <a:blip r:embed="rId14" cstate="print">
             <a:extLst>
               <a:ext uri="{28A0092B-C50C-407E-A947-70E740481C1C}">
                 <a14:useLocalDpi xmlns:a14="http://schemas.microsoft.com/office/drawing/2010/main" val="0"/>
@@ -5441,33 +5376,28 @@
         </p:spPr>
       </p:pic>
     </p:spTree>
-    <p:extLst>
-      <p:ext uri="{BB962C8B-B14F-4D97-AF65-F5344CB8AC3E}">
-        <p14:creationId xmlns:p14="http://schemas.microsoft.com/office/powerpoint/2010/main" val="3691570016"/>
-      </p:ext>
-    </p:extLst>
   </p:cSld>
   <p:clrMap bg1="lt1" tx1="dk1" bg2="lt2" tx2="dk2" accent1="accent1" accent2="accent2" accent3="accent3" accent4="accent4" accent5="accent5" accent6="accent6" hlink="hlink" folHlink="folHlink"/>
   <p:sldLayoutIdLst>
     <p:sldLayoutId id="2147483649" r:id="rId1"/>
-    <p:sldLayoutId id="2147483657" r:id="rId2"/>
-    <p:sldLayoutId id="2147483661" r:id="rId3"/>
-    <p:sldLayoutId id="2147483656" r:id="rId4"/>
-    <p:sldLayoutId id="2147483650" r:id="rId5"/>
-    <p:sldLayoutId id="2147483659" r:id="rId6"/>
-    <p:sldLayoutId id="2147483658" r:id="rId7"/>
-    <p:sldLayoutId id="2147483660" r:id="rId8"/>
-    <p:sldLayoutId id="2147483662" r:id="rId9"/>
-    <p:sldLayoutId id="2147483651" r:id="rId10"/>
-    <p:sldLayoutId id="2147483654" r:id="rId11"/>
-    <p:sldLayoutId id="2147483655" r:id="rId12"/>
-    <p:sldLayoutId id="2147483663" r:id="rId13"/>
+    <p:sldLayoutId id="2147483650" r:id="rId2"/>
+    <p:sldLayoutId id="2147483651" r:id="rId3"/>
+    <p:sldLayoutId id="2147483652" r:id="rId4"/>
+    <p:sldLayoutId id="2147483653" r:id="rId5"/>
+    <p:sldLayoutId id="2147483654" r:id="rId6"/>
+    <p:sldLayoutId id="2147483655" r:id="rId7"/>
+    <p:sldLayoutId id="2147483656" r:id="rId8"/>
+    <p:sldLayoutId id="2147483657" r:id="rId9"/>
+    <p:sldLayoutId id="2147483658" r:id="rId10"/>
+    <p:sldLayoutId id="2147483659" r:id="rId11"/>
+    <p:sldLayoutId id="2147483660" r:id="rId12"/>
+    <p:sldLayoutId id="2147483661" r:id="rId13"/>
   </p:sldLayoutIdLst>
-  <mc:AlternateContent xmlns:mc="http://schemas.openxmlformats.org/markup-compatibility/2006" xmlns:p14="http://schemas.microsoft.com/office/powerpoint/2010/main">
-    <mc:Choice Requires="p14">
+  <mc:AlternateContent xmlns:mc="http://schemas.openxmlformats.org/markup-compatibility/2006">
+    <mc:Choice xmlns:p14="http://schemas.microsoft.com/office/powerpoint/2010/main" Requires="p14">
       <p:transition spd="slow" p14:dur="2000"/>
     </mc:Choice>
-    <mc:Fallback xmlns="">
+    <mc:Fallback>
       <p:transition spd="slow"/>
     </mc:Fallback>
   </mc:AlternateContent>
@@ -5499,7 +5429,7 @@
       </a:lvl1pPr>
     </p:titleStyle>
     <p:bodyStyle>
-      <a:lvl1pPr marL="256032" indent="-256032" algn="l" defTabSz="914400" rtl="0" eaLnBrk="1" latinLnBrk="0" hangingPunct="1">
+      <a:lvl1pPr marL="255905" indent="-255905" algn="l" defTabSz="914400" rtl="0" eaLnBrk="1" latinLnBrk="0" hangingPunct="1">
         <a:spcBef>
           <a:spcPts val="1500"/>
         </a:spcBef>
@@ -5805,6 +5735,7 @@
               <a:rPr lang="en-US" dirty="0"/>
               <a:t>Entrepreneurship: Successfully Launching New Ventures</a:t>
             </a:r>
+            <a:endParaRPr lang="en-US" dirty="0"/>
           </a:p>
         </p:txBody>
       </p:sp>
@@ -5820,7 +5751,7 @@
         </p:nvSpPr>
         <p:spPr>
           <a:xfrm>
-            <a:off x="457202" y="1327332"/>
+            <a:off x="533402" y="1327332"/>
             <a:ext cx="8229598" cy="349068"/>
           </a:xfrm>
         </p:spPr>
@@ -5906,6 +5837,7 @@
               <a:rPr lang="en-US" sz="3600" dirty="0"/>
               <a:t>Ideas</a:t>
             </a:r>
+            <a:endParaRPr lang="en-US" sz="3600" dirty="0"/>
           </a:p>
         </p:txBody>
       </p:sp>
@@ -5918,7 +5850,7 @@
           <p:nvPr/>
         </p:nvPicPr>
         <p:blipFill>
-          <a:blip r:embed="rId3" cstate="print"/>
+          <a:blip r:embed="rId1" cstate="print"/>
           <a:stretch>
             <a:fillRect/>
           </a:stretch>
@@ -5934,15 +5866,18 @@
         </p:spPr>
       </p:pic>
     </p:spTree>
-    <p:extLst>
-      <p:ext uri="{BB962C8B-B14F-4D97-AF65-F5344CB8AC3E}">
-        <p14:creationId xmlns:p14="http://schemas.microsoft.com/office/powerpoint/2010/main" val="523069678"/>
-      </p:ext>
-    </p:extLst>
   </p:cSld>
   <p:clrMapOvr>
     <a:masterClrMapping/>
   </p:clrMapOvr>
+  <mc:AlternateContent xmlns:mc="http://schemas.openxmlformats.org/markup-compatibility/2006">
+    <mc:Choice xmlns:p14="http://schemas.microsoft.com/office/powerpoint/2010/main" Requires="p14">
+      <p:transition spd="slow" p14:dur="2000"/>
+    </mc:Choice>
+    <mc:Fallback>
+      <p:transition spd="slow"/>
+    </mc:Fallback>
+  </mc:AlternateContent>
   <p:timing>
     <p:tnLst>
       <p:par>
@@ -6041,6 +5976,7 @@
               <a:rPr lang="en-US" sz="2400" dirty="0" smtClean="0"/>
               <a:t>business opportunities.</a:t>
             </a:r>
+            <a:endParaRPr lang="en-US" sz="2400" dirty="0" smtClean="0"/>
           </a:p>
           <a:p>
             <a:pPr marL="0" indent="0">
@@ -6050,12 +5986,14 @@
               <a:rPr lang="en-US" sz="2400" b="1" dirty="0"/>
               <a:t>Examples of Entire Industries that Have Been Created as the Result of Technological Advances</a:t>
             </a:r>
+            <a:endParaRPr lang="en-US" sz="2400" b="1" dirty="0"/>
           </a:p>
           <a:p>
             <a:r>
               <a:rPr lang="en-US" sz="2200" dirty="0"/>
               <a:t>Computer industry</a:t>
             </a:r>
+            <a:endParaRPr lang="en-US" sz="2200" dirty="0"/>
           </a:p>
           <a:p>
             <a:r>
@@ -6085,11 +6023,11 @@
   <p:clrMapOvr>
     <a:masterClrMapping/>
   </p:clrMapOvr>
-  <mc:AlternateContent xmlns:mc="http://schemas.openxmlformats.org/markup-compatibility/2006" xmlns:p14="http://schemas.microsoft.com/office/powerpoint/2010/main">
-    <mc:Choice Requires="p14">
+  <mc:AlternateContent xmlns:mc="http://schemas.openxmlformats.org/markup-compatibility/2006">
+    <mc:Choice xmlns:p14="http://schemas.microsoft.com/office/powerpoint/2010/main" Requires="p14">
       <p:transition spd="slow" p14:dur="2000"/>
     </mc:Choice>
-    <mc:Fallback xmlns="">
+    <mc:Fallback>
       <p:transition spd="slow"/>
     </mc:Fallback>
   </mc:AlternateContent>
@@ -6190,6 +6128,7 @@
               <a:rPr lang="en-US" sz="2400" dirty="0" smtClean="0"/>
               <a:t>Once a technology is created, products often emerge to advance it.</a:t>
             </a:r>
+            <a:endParaRPr lang="en-US" sz="2400" dirty="0" smtClean="0"/>
           </a:p>
           <a:p>
             <a:pPr>
@@ -6226,11 +6165,11 @@
   <p:clrMapOvr>
     <a:masterClrMapping/>
   </p:clrMapOvr>
-  <mc:AlternateContent xmlns:mc="http://schemas.openxmlformats.org/markup-compatibility/2006" xmlns:p14="http://schemas.microsoft.com/office/powerpoint/2010/main">
-    <mc:Choice Requires="p14">
+  <mc:AlternateContent xmlns:mc="http://schemas.openxmlformats.org/markup-compatibility/2006">
+    <mc:Choice xmlns:p14="http://schemas.microsoft.com/office/powerpoint/2010/main" Requires="p14">
       <p:transition spd="slow" p14:dur="2000"/>
     </mc:Choice>
-    <mc:Fallback xmlns="">
+    <mc:Fallback>
       <p:transition spd="slow"/>
     </mc:Fallback>
   </mc:AlternateContent>
@@ -6318,6 +6257,7 @@
               <a:rPr lang="en-US" sz="2400" dirty="0" smtClean="0"/>
               <a:t>.</a:t>
             </a:r>
+            <a:endParaRPr lang="en-US" sz="2400" dirty="0" smtClean="0"/>
           </a:p>
           <a:p>
             <a:pPr marL="0" indent="0">
@@ -6327,6 +6267,7 @@
               <a:rPr lang="en-US" sz="2400" b="1" dirty="0"/>
               <a:t>General Example</a:t>
             </a:r>
+            <a:endParaRPr lang="en-US" sz="2400" b="1" dirty="0"/>
           </a:p>
           <a:p>
             <a:pPr marL="0" indent="0" algn="just">
@@ -6345,11 +6286,11 @@
   <p:clrMapOvr>
     <a:masterClrMapping/>
   </p:clrMapOvr>
-  <mc:AlternateContent xmlns:mc="http://schemas.openxmlformats.org/markup-compatibility/2006" xmlns:p14="http://schemas.microsoft.com/office/powerpoint/2010/main">
-    <mc:Choice Requires="p14">
+  <mc:AlternateContent xmlns:mc="http://schemas.openxmlformats.org/markup-compatibility/2006">
+    <mc:Choice xmlns:p14="http://schemas.microsoft.com/office/powerpoint/2010/main" Requires="p14">
       <p:transition spd="slow" p14:dur="2000"/>
     </mc:Choice>
-    <mc:Fallback xmlns="">
+    <mc:Fallback>
       <p:transition spd="slow"/>
     </mc:Fallback>
   </mc:AlternateContent>
@@ -6452,6 +6393,7 @@
               <a:rPr lang="en-US" altLang="en-US" sz="2400" b="1" dirty="0" smtClean="0"/>
               <a:t>Example</a:t>
             </a:r>
+            <a:endParaRPr lang="en-US" altLang="en-US" sz="2400" b="1" dirty="0" smtClean="0"/>
           </a:p>
           <a:p>
             <a:pPr marL="0" indent="0" algn="just">
@@ -6470,11 +6412,11 @@
   <p:clrMapOvr>
     <a:masterClrMapping/>
   </p:clrMapOvr>
-  <mc:AlternateContent xmlns:mc="http://schemas.openxmlformats.org/markup-compatibility/2006" xmlns:p14="http://schemas.microsoft.com/office/powerpoint/2010/main">
-    <mc:Choice Requires="p14">
+  <mc:AlternateContent xmlns:mc="http://schemas.openxmlformats.org/markup-compatibility/2006">
+    <mc:Choice xmlns:p14="http://schemas.microsoft.com/office/powerpoint/2010/main" Requires="p14">
       <p:transition spd="slow" p14:dur="2000"/>
     </mc:Choice>
-    <mc:Fallback xmlns="">
+    <mc:Fallback>
       <p:transition spd="slow"/>
     </mc:Fallback>
   </mc:AlternateContent>
@@ -6557,7 +6499,7 @@
           <a:bodyPr/>
           <a:lstStyle/>
           <a:p>
-            <a:pPr marL="256032" indent="-256032">
+            <a:pPr marL="255905" indent="-255905">
               <a:buSzPct val="100000"/>
             </a:pPr>
             <a:r>
@@ -6566,27 +6508,36 @@
               </a:rPr>
               <a:t>Solving a Problem</a:t>
             </a:r>
-          </a:p>
-          <a:p>
-            <a:pPr marL="740664" lvl="1" algn="just"/>
+            <a:endParaRPr lang="en-US" sz="2400" b="1" dirty="0" smtClean="0">
+              <a:latin typeface="+mj-lt"/>
+            </a:endParaRPr>
+          </a:p>
+          <a:p>
+            <a:pPr marL="740410" lvl="1" algn="just"/>
             <a:r>
               <a:rPr lang="en-US" sz="2400" dirty="0" smtClean="0">
                 <a:latin typeface="+mj-lt"/>
               </a:rPr>
               <a:t>Sometimes identifying opportunities simply involves noticing a problem and finding a way to solve it.</a:t>
             </a:r>
-          </a:p>
-          <a:p>
-            <a:pPr marL="740664" lvl="1" algn="just"/>
+            <a:endParaRPr lang="en-US" sz="2400" dirty="0" smtClean="0">
+              <a:latin typeface="+mj-lt"/>
+            </a:endParaRPr>
+          </a:p>
+          <a:p>
+            <a:pPr marL="740410" lvl="1" algn="just"/>
             <a:r>
               <a:rPr lang="en-US" sz="2400" dirty="0" smtClean="0">
                 <a:latin typeface="+mj-lt"/>
               </a:rPr>
               <a:t>These problems can be pinpointed through observing trends and through more simple means, such as intuition, serendipity, or chance.</a:t>
             </a:r>
-          </a:p>
-          <a:p>
-            <a:pPr marL="740664" lvl="1" algn="just"/>
+            <a:endParaRPr lang="en-US" sz="2400" dirty="0" smtClean="0">
+              <a:latin typeface="+mj-lt"/>
+            </a:endParaRPr>
+          </a:p>
+          <a:p>
+            <a:pPr marL="740410" lvl="1" algn="just"/>
             <a:r>
               <a:rPr lang="en-US" sz="2400" dirty="0" smtClean="0">
                 <a:latin typeface="+mj-lt"/>
@@ -6604,11 +6555,11 @@
   <p:clrMapOvr>
     <a:masterClrMapping/>
   </p:clrMapOvr>
-  <mc:AlternateContent xmlns:mc="http://schemas.openxmlformats.org/markup-compatibility/2006" xmlns:p14="http://schemas.microsoft.com/office/powerpoint/2010/main">
-    <mc:Choice Requires="p14">
+  <mc:AlternateContent xmlns:mc="http://schemas.openxmlformats.org/markup-compatibility/2006">
+    <mc:Choice xmlns:p14="http://schemas.microsoft.com/office/powerpoint/2010/main" Requires="p14">
       <p:transition spd="slow" p14:dur="2000"/>
     </mc:Choice>
-    <mc:Fallback xmlns="">
+    <mc:Fallback>
       <p:transition spd="slow"/>
     </mc:Fallback>
   </mc:AlternateContent>
@@ -6698,6 +6649,7 @@
               <a:rPr lang="en-US" sz="2400" b="1" dirty="0"/>
               <a:t>Specific Example</a:t>
             </a:r>
+            <a:endParaRPr lang="en-US" sz="2400" b="1" dirty="0"/>
           </a:p>
           <a:p>
             <a:pPr marL="0" indent="0" algn="just">
@@ -6723,11 +6675,11 @@
   <p:clrMapOvr>
     <a:masterClrMapping/>
   </p:clrMapOvr>
-  <mc:AlternateContent xmlns:mc="http://schemas.openxmlformats.org/markup-compatibility/2006" xmlns:p14="http://schemas.microsoft.com/office/powerpoint/2010/main">
-    <mc:Choice Requires="p14">
+  <mc:AlternateContent xmlns:mc="http://schemas.openxmlformats.org/markup-compatibility/2006">
+    <mc:Choice xmlns:p14="http://schemas.microsoft.com/office/powerpoint/2010/main" Requires="p14">
       <p:transition spd="slow" p14:dur="2000"/>
     </mc:Choice>
-    <mc:Fallback xmlns="">
+    <mc:Fallback>
       <p:transition spd="slow"/>
     </mc:Fallback>
   </mc:AlternateContent>
@@ -6810,7 +6762,7 @@
           <a:bodyPr/>
           <a:lstStyle/>
           <a:p>
-            <a:pPr marL="256032" indent="-256032">
+            <a:pPr marL="255905" indent="-255905">
               <a:buSzPct val="100000"/>
             </a:pPr>
             <a:r>
@@ -6819,18 +6771,24 @@
               </a:rPr>
               <a:t>Gaps in the Marketplace</a:t>
             </a:r>
-          </a:p>
-          <a:p>
-            <a:pPr marL="740664" lvl="1" algn="just"/>
+            <a:endParaRPr lang="en-US" sz="2400" b="1" dirty="0" smtClean="0">
+              <a:latin typeface="+mj-lt"/>
+            </a:endParaRPr>
+          </a:p>
+          <a:p>
+            <a:pPr marL="740410" lvl="1" algn="just"/>
             <a:r>
               <a:rPr lang="en-US" sz="2400" dirty="0" smtClean="0">
                 <a:latin typeface="+mj-lt"/>
               </a:rPr>
               <a:t>A third approach to identifying opportunities is to find a gap in the marketplace.</a:t>
             </a:r>
-          </a:p>
-          <a:p>
-            <a:pPr marL="740664" lvl="1" algn="just"/>
+            <a:endParaRPr lang="en-US" sz="2400" dirty="0" smtClean="0">
+              <a:latin typeface="+mj-lt"/>
+            </a:endParaRPr>
+          </a:p>
+          <a:p>
+            <a:pPr marL="740410" lvl="1" algn="just"/>
             <a:r>
               <a:rPr lang="en-US" sz="2400" dirty="0" smtClean="0">
                 <a:latin typeface="+mj-lt"/>
@@ -6860,11 +6818,11 @@
   <p:clrMapOvr>
     <a:masterClrMapping/>
   </p:clrMapOvr>
-  <mc:AlternateContent xmlns:mc="http://schemas.openxmlformats.org/markup-compatibility/2006" xmlns:p14="http://schemas.microsoft.com/office/powerpoint/2010/main">
-    <mc:Choice Requires="p14">
+  <mc:AlternateContent xmlns:mc="http://schemas.openxmlformats.org/markup-compatibility/2006">
+    <mc:Choice xmlns:p14="http://schemas.microsoft.com/office/powerpoint/2010/main" Requires="p14">
       <p:transition spd="slow" p14:dur="2000"/>
     </mc:Choice>
-    <mc:Fallback xmlns="">
+    <mc:Fallback>
       <p:transition spd="slow"/>
     </mc:Fallback>
   </mc:AlternateContent>
@@ -6956,6 +6914,7 @@
               <a:rPr lang="en-US" sz="2400" dirty="0" smtClean="0"/>
               <a:t>.</a:t>
             </a:r>
+            <a:endParaRPr lang="en-US" sz="2400" dirty="0" smtClean="0"/>
           </a:p>
           <a:p>
             <a:pPr marL="0" indent="0">
@@ -6965,6 +6924,7 @@
               <a:rPr lang="en-US" sz="2400" b="1" dirty="0"/>
               <a:t>Specific Example</a:t>
             </a:r>
+            <a:endParaRPr lang="en-US" sz="2400" b="1" dirty="0"/>
           </a:p>
           <a:p>
             <a:pPr marL="0" indent="0" algn="just">
@@ -7003,11 +6963,11 @@
   <p:clrMapOvr>
     <a:masterClrMapping/>
   </p:clrMapOvr>
-  <mc:AlternateContent xmlns:mc="http://schemas.openxmlformats.org/markup-compatibility/2006" xmlns:p14="http://schemas.microsoft.com/office/powerpoint/2010/main">
-    <mc:Choice Requires="p14">
+  <mc:AlternateContent xmlns:mc="http://schemas.openxmlformats.org/markup-compatibility/2006">
+    <mc:Choice xmlns:p14="http://schemas.microsoft.com/office/powerpoint/2010/main" Requires="p14">
       <p:transition spd="slow" p14:dur="2000"/>
     </mc:Choice>
-    <mc:Fallback xmlns="">
+    <mc:Fallback>
       <p:transition spd="slow"/>
     </mc:Fallback>
   </mc:AlternateContent>
@@ -7092,24 +7052,28 @@
               <a:rPr lang="en-US" sz="2400" dirty="0" smtClean="0"/>
               <a:t>others</a:t>
             </a:r>
+            <a:endParaRPr lang="en-US" sz="2400" dirty="0" smtClean="0"/>
           </a:p>
           <a:p>
             <a:r>
               <a:rPr lang="en-US" sz="2200" dirty="0" smtClean="0"/>
               <a:t>Prior Industry Experience</a:t>
             </a:r>
+            <a:endParaRPr lang="en-US" sz="2200" dirty="0" smtClean="0"/>
           </a:p>
           <a:p>
             <a:r>
               <a:rPr lang="en-US" sz="2200" dirty="0" smtClean="0"/>
               <a:t>Cognitive Factors</a:t>
             </a:r>
+            <a:endParaRPr lang="en-US" sz="2200" dirty="0" smtClean="0"/>
           </a:p>
           <a:p>
             <a:r>
               <a:rPr lang="en-US" sz="2200" dirty="0" smtClean="0"/>
               <a:t>Social Networks</a:t>
             </a:r>
+            <a:endParaRPr lang="en-US" sz="2200" dirty="0" smtClean="0"/>
           </a:p>
           <a:p>
             <a:r>
@@ -7125,11 +7089,11 @@
   <p:clrMapOvr>
     <a:masterClrMapping/>
   </p:clrMapOvr>
-  <mc:AlternateContent xmlns:mc="http://schemas.openxmlformats.org/markup-compatibility/2006" xmlns:p14="http://schemas.microsoft.com/office/powerpoint/2010/main">
-    <mc:Choice Requires="p14">
+  <mc:AlternateContent xmlns:mc="http://schemas.openxmlformats.org/markup-compatibility/2006">
+    <mc:Choice xmlns:p14="http://schemas.microsoft.com/office/powerpoint/2010/main" Requires="p14">
       <p:transition spd="slow" p14:dur="2000"/>
     </mc:Choice>
-    <mc:Fallback xmlns="">
+    <mc:Fallback>
       <p:transition spd="slow"/>
     </mc:Fallback>
   </mc:AlternateContent>
@@ -7212,7 +7176,7 @@
           <a:bodyPr/>
           <a:lstStyle/>
           <a:p>
-            <a:pPr marL="256032" indent="-256032">
+            <a:pPr marL="255905" indent="-255905">
               <a:buSzPct val="100000"/>
             </a:pPr>
             <a:r>
@@ -7221,9 +7185,12 @@
               </a:rPr>
               <a:t>Prior Industry Experience</a:t>
             </a:r>
-          </a:p>
-          <a:p>
-            <a:pPr marL="740664" lvl="1" algn="just"/>
+            <a:endParaRPr lang="en-US" sz="2400" b="1" dirty="0" smtClean="0">
+              <a:latin typeface="+mj-lt"/>
+            </a:endParaRPr>
+          </a:p>
+          <a:p>
+            <a:pPr marL="740410" lvl="1" algn="just"/>
             <a:r>
               <a:rPr lang="en-US" sz="2400" dirty="0">
                 <a:latin typeface="+mj-lt"/>
@@ -7236,6 +7203,9 @@
               </a:rPr>
               <a:t>tudies have shown that prior experience in an industry helps an entrepreneur recognize business opportunities.</a:t>
             </a:r>
+            <a:endParaRPr lang="en-US" sz="2400" dirty="0" smtClean="0">
+              <a:latin typeface="+mj-lt"/>
+            </a:endParaRPr>
           </a:p>
           <a:p>
             <a:pPr lvl="2" algn="just"/>
@@ -7245,6 +7215,9 @@
               </a:rPr>
               <a:t>By working in an industry, an individual may spot a market niche that is underserved.</a:t>
             </a:r>
+            <a:endParaRPr lang="en-US" sz="2200" dirty="0" smtClean="0">
+              <a:latin typeface="+mj-lt"/>
+            </a:endParaRPr>
           </a:p>
           <a:p>
             <a:pPr lvl="2" algn="just"/>
@@ -7254,6 +7227,9 @@
               </a:rPr>
               <a:t>It is also possible that by working in an industry, an individual builds a network of social contacts who provide insights that lead to recognizing new opportunities.</a:t>
             </a:r>
+            <a:endParaRPr lang="en-US" sz="2200" dirty="0" smtClean="0">
+              <a:latin typeface="+mj-lt"/>
+            </a:endParaRPr>
           </a:p>
           <a:p>
             <a:pPr lvl="2"/>
@@ -7268,11 +7244,11 @@
   <p:clrMapOvr>
     <a:masterClrMapping/>
   </p:clrMapOvr>
-  <mc:AlternateContent xmlns:mc="http://schemas.openxmlformats.org/markup-compatibility/2006" xmlns:p14="http://schemas.microsoft.com/office/powerpoint/2010/main">
-    <mc:Choice Requires="p14">
+  <mc:AlternateContent xmlns:mc="http://schemas.openxmlformats.org/markup-compatibility/2006">
+    <mc:Choice xmlns:p14="http://schemas.microsoft.com/office/powerpoint/2010/main" Requires="p14">
       <p:transition spd="slow" p14:dur="2000"/>
     </mc:Choice>
-    <mc:Fallback xmlns="">
+    <mc:Fallback>
       <p:transition spd="slow"/>
     </mc:Fallback>
   </mc:AlternateContent>
@@ -7365,6 +7341,9 @@
               </a:rPr>
               <a:t> Explain the difference between opportunities and ideas.</a:t>
             </a:r>
+            <a:endParaRPr lang="en-US" sz="2400" dirty="0" smtClean="0">
+              <a:latin typeface="+mj-lt"/>
+            </a:endParaRPr>
           </a:p>
           <a:p>
             <a:pPr marL="517525" indent="-517525" algn="just">
@@ -7392,6 +7371,9 @@
               </a:rPr>
               <a:t>Describe the three general approaches entrepreneurs use to identify opportunities.</a:t>
             </a:r>
+            <a:endParaRPr lang="en-US" sz="2400" dirty="0" smtClean="0">
+              <a:latin typeface="+mj-lt"/>
+            </a:endParaRPr>
           </a:p>
           <a:p>
             <a:pPr marL="517525" indent="-517525" algn="just">
@@ -7413,6 +7395,9 @@
               </a:rPr>
               <a:t> Discuss the personal characteristics of entrepreneurs that contribute to their ability to recognize business opportunities.</a:t>
             </a:r>
+            <a:endParaRPr lang="en-US" sz="2400" dirty="0" smtClean="0">
+              <a:latin typeface="+mj-lt"/>
+            </a:endParaRPr>
           </a:p>
           <a:p>
             <a:pPr marL="517525" indent="-517525" algn="just">
@@ -7434,6 +7419,9 @@
               </a:rPr>
               <a:t> Identify and describe techniques entrepreneurs use to generate ideas.</a:t>
             </a:r>
+            <a:endParaRPr lang="en-US" sz="2400" dirty="0" smtClean="0">
+              <a:latin typeface="+mj-lt"/>
+            </a:endParaRPr>
           </a:p>
           <a:p>
             <a:pPr marL="517525" indent="-517525">
@@ -7449,11 +7437,11 @@
   <p:clrMapOvr>
     <a:masterClrMapping/>
   </p:clrMapOvr>
-  <mc:AlternateContent xmlns:mc="http://schemas.openxmlformats.org/markup-compatibility/2006" xmlns:p14="http://schemas.microsoft.com/office/powerpoint/2010/main">
-    <mc:Choice Requires="p14">
+  <mc:AlternateContent xmlns:mc="http://schemas.openxmlformats.org/markup-compatibility/2006">
+    <mc:Choice xmlns:p14="http://schemas.microsoft.com/office/powerpoint/2010/main" Requires="p14">
       <p:transition spd="slow" p14:dur="2000"/>
     </mc:Choice>
-    <mc:Fallback xmlns="">
+    <mc:Fallback>
       <p:transition spd="slow"/>
     </mc:Fallback>
   </mc:AlternateContent>
@@ -7540,7 +7528,7 @@
           <a:bodyPr/>
           <a:lstStyle/>
           <a:p>
-            <a:pPr marL="256032" indent="-256032">
+            <a:pPr marL="255905" indent="-255905">
               <a:buSzPct val="100000"/>
             </a:pPr>
             <a:r>
@@ -7549,27 +7537,36 @@
               </a:rPr>
               <a:t>Prior Industry Experience</a:t>
             </a:r>
-          </a:p>
-          <a:p>
-            <a:pPr marL="740664" lvl="1" algn="just"/>
+            <a:endParaRPr lang="en-US" sz="2400" b="1" dirty="0" smtClean="0">
+              <a:latin typeface="+mj-lt"/>
+            </a:endParaRPr>
+          </a:p>
+          <a:p>
+            <a:pPr marL="740410" lvl="1" algn="just"/>
             <a:r>
               <a:rPr lang="en-US" sz="2400" dirty="0" smtClean="0">
                 <a:latin typeface="+mj-lt"/>
               </a:rPr>
               <a:t>It is also important to note that anecdotal evidence suggests that people outside an industry can sometimes enter it with a new set of eyes, and as a result innovate in ways that people with prior experience might find difficult.</a:t>
             </a:r>
-          </a:p>
-          <a:p>
-            <a:pPr marL="1140714" lvl="2" algn="just"/>
+            <a:endParaRPr lang="en-US" sz="2400" dirty="0" smtClean="0">
+              <a:latin typeface="+mj-lt"/>
+            </a:endParaRPr>
+          </a:p>
+          <a:p>
+            <a:pPr marL="1140460" lvl="2" algn="just"/>
             <a:r>
               <a:rPr lang="en-US" sz="2200" dirty="0" smtClean="0">
                 <a:latin typeface="+mj-lt"/>
               </a:rPr>
               <a:t>For example, Elon Musk, the founder of Tesla, had no prior experience in the auto industry.</a:t>
             </a:r>
-          </a:p>
-          <a:p>
-            <a:pPr marL="1140714" lvl="2" algn="just"/>
+            <a:endParaRPr lang="en-US" sz="2200" dirty="0" smtClean="0">
+              <a:latin typeface="+mj-lt"/>
+            </a:endParaRPr>
+          </a:p>
+          <a:p>
+            <a:pPr marL="1140460" lvl="2" algn="just"/>
             <a:r>
               <a:rPr lang="en-US" sz="2200" dirty="0" smtClean="0">
                 <a:latin typeface="+mj-lt"/>
@@ -7583,20 +7580,15 @@
         </p:txBody>
       </p:sp>
     </p:spTree>
-    <p:extLst>
-      <p:ext uri="{BB962C8B-B14F-4D97-AF65-F5344CB8AC3E}">
-        <p14:creationId xmlns:p14="http://schemas.microsoft.com/office/powerpoint/2010/main" val="4100402588"/>
-      </p:ext>
-    </p:extLst>
   </p:cSld>
   <p:clrMapOvr>
     <a:masterClrMapping/>
   </p:clrMapOvr>
-  <mc:AlternateContent xmlns:mc="http://schemas.openxmlformats.org/markup-compatibility/2006" xmlns:p14="http://schemas.microsoft.com/office/powerpoint/2010/main">
-    <mc:Choice Requires="p14">
+  <mc:AlternateContent xmlns:mc="http://schemas.openxmlformats.org/markup-compatibility/2006">
+    <mc:Choice xmlns:p14="http://schemas.microsoft.com/office/powerpoint/2010/main" Requires="p14">
       <p:transition spd="slow" p14:dur="2000"/>
     </mc:Choice>
-    <mc:Fallback xmlns="">
+    <mc:Fallback>
       <p:transition spd="slow"/>
     </mc:Fallback>
   </mc:AlternateContent>
@@ -7675,7 +7667,7 @@
           <a:bodyPr/>
           <a:lstStyle/>
           <a:p>
-            <a:pPr marL="256032" indent="-256032">
+            <a:pPr marL="255905" indent="-255905">
               <a:buSzPct val="100000"/>
             </a:pPr>
             <a:r>
@@ -7684,18 +7676,24 @@
               </a:rPr>
               <a:t>Cognitive Factors</a:t>
             </a:r>
-          </a:p>
-          <a:p>
-            <a:pPr marL="740664" lvl="1" algn="just"/>
+            <a:endParaRPr lang="en-US" sz="2400" b="1" dirty="0" smtClean="0">
+              <a:latin typeface="+mj-lt"/>
+            </a:endParaRPr>
+          </a:p>
+          <a:p>
+            <a:pPr marL="740410" lvl="1" algn="just"/>
             <a:r>
               <a:rPr lang="en-US" sz="2400" dirty="0" smtClean="0">
                 <a:latin typeface="+mj-lt"/>
               </a:rPr>
               <a:t>Studies have shown that opportunity recognition may be an innate skill or cognitive process.</a:t>
             </a:r>
-          </a:p>
-          <a:p>
-            <a:pPr marL="740664" lvl="1" algn="just"/>
+            <a:endParaRPr lang="en-US" sz="2400" dirty="0" smtClean="0">
+              <a:latin typeface="+mj-lt"/>
+            </a:endParaRPr>
+          </a:p>
+          <a:p>
+            <a:pPr marL="740410" lvl="1" algn="just"/>
             <a:r>
               <a:rPr lang="en-US" sz="2400" dirty="0" smtClean="0">
                 <a:latin typeface="+mj-lt"/>
@@ -7726,9 +7724,12 @@
               </a:rPr>
               <a:t> that allows them to see opportunities that others miss.</a:t>
             </a:r>
-          </a:p>
-          <a:p>
-            <a:pPr marL="740664" lvl="1" algn="just"/>
+            <a:endParaRPr lang="en-US" sz="2400" dirty="0" smtClean="0">
+              <a:latin typeface="+mj-lt"/>
+            </a:endParaRPr>
+          </a:p>
+          <a:p>
+            <a:pPr marL="740410" lvl="1" algn="just"/>
             <a:r>
               <a:rPr lang="en-US" sz="2400" dirty="0" smtClean="0">
                 <a:latin typeface="+mj-lt"/>
@@ -7770,11 +7771,11 @@
   <p:clrMapOvr>
     <a:masterClrMapping/>
   </p:clrMapOvr>
-  <mc:AlternateContent xmlns:mc="http://schemas.openxmlformats.org/markup-compatibility/2006" xmlns:p14="http://schemas.microsoft.com/office/powerpoint/2010/main">
-    <mc:Choice Requires="p14">
+  <mc:AlternateContent xmlns:mc="http://schemas.openxmlformats.org/markup-compatibility/2006">
+    <mc:Choice xmlns:p14="http://schemas.microsoft.com/office/powerpoint/2010/main" Requires="p14">
       <p:transition spd="slow" p14:dur="2000"/>
     </mc:Choice>
-    <mc:Fallback xmlns="">
+    <mc:Fallback>
       <p:transition spd="slow"/>
     </mc:Fallback>
   </mc:AlternateContent>
@@ -7857,7 +7858,7 @@
           <a:bodyPr/>
           <a:lstStyle/>
           <a:p>
-            <a:pPr marL="255600" indent="-255600">
+            <a:pPr marL="255905" indent="-255905">
               <a:buSzPct val="100000"/>
             </a:pPr>
             <a:r>
@@ -7866,9 +7867,12 @@
               </a:rPr>
               <a:t>Social Networks</a:t>
             </a:r>
-          </a:p>
-          <a:p>
-            <a:pPr marL="740664" lvl="1" algn="just"/>
+            <a:endParaRPr lang="en-US" sz="2200" b="1" dirty="0" smtClean="0">
+              <a:latin typeface="+mj-lt"/>
+            </a:endParaRPr>
+          </a:p>
+          <a:p>
+            <a:pPr marL="740410" lvl="1" algn="just"/>
             <a:r>
               <a:rPr lang="en-US" sz="2200" dirty="0" smtClean="0">
                 <a:latin typeface="+mj-lt"/>
@@ -7887,27 +7891,36 @@
               </a:rPr>
               <a:t>s social network affects opportunity recognition.  </a:t>
             </a:r>
-          </a:p>
-          <a:p>
-            <a:pPr marL="740664" lvl="1" algn="just"/>
+            <a:endParaRPr lang="en-US" sz="2200" dirty="0" smtClean="0">
+              <a:latin typeface="+mj-lt"/>
+            </a:endParaRPr>
+          </a:p>
+          <a:p>
+            <a:pPr marL="740410" lvl="1" algn="just"/>
             <a:r>
               <a:rPr lang="en-US" sz="2200" dirty="0" smtClean="0">
                 <a:latin typeface="+mj-lt"/>
               </a:rPr>
               <a:t>People who build a substantial network of social and professional contacts will be exposed to more opportunities and ideas than people with sparse networks.</a:t>
             </a:r>
-          </a:p>
-          <a:p>
-            <a:pPr marL="740664" lvl="1" algn="just"/>
+            <a:endParaRPr lang="en-US" sz="2200" dirty="0" smtClean="0">
+              <a:latin typeface="+mj-lt"/>
+            </a:endParaRPr>
+          </a:p>
+          <a:p>
+            <a:pPr marL="740410" lvl="1" algn="just"/>
             <a:r>
               <a:rPr lang="en-US" sz="2200" dirty="0" smtClean="0">
                 <a:latin typeface="+mj-lt"/>
               </a:rPr>
               <a:t>Research results suggest that between 40% and 50% of people who start a business got their idea via a social contact.</a:t>
             </a:r>
-          </a:p>
-          <a:p>
-            <a:pPr marL="255600" indent="-255600">
+            <a:endParaRPr lang="en-US" sz="2200" dirty="0" smtClean="0">
+              <a:latin typeface="+mj-lt"/>
+            </a:endParaRPr>
+          </a:p>
+          <a:p>
+            <a:pPr marL="255905" indent="-255905">
               <a:buSzPct val="100000"/>
             </a:pPr>
             <a:r>
@@ -7916,9 +7929,12 @@
               </a:rPr>
               <a:t>Strong-Tie Vs. Weak-Tie Relationships</a:t>
             </a:r>
-          </a:p>
-          <a:p>
-            <a:pPr marL="740664" lvl="1" algn="just"/>
+            <a:endParaRPr lang="en-US" sz="2200" b="1" dirty="0" smtClean="0">
+              <a:latin typeface="+mj-lt"/>
+            </a:endParaRPr>
+          </a:p>
+          <a:p>
+            <a:pPr marL="740410" lvl="1" algn="just"/>
             <a:r>
               <a:rPr lang="en-US" sz="2200" dirty="0" smtClean="0">
                 <a:latin typeface="+mj-lt"/>
@@ -7960,11 +7976,11 @@
   <p:clrMapOvr>
     <a:masterClrMapping/>
   </p:clrMapOvr>
-  <mc:AlternateContent xmlns:mc="http://schemas.openxmlformats.org/markup-compatibility/2006" xmlns:p14="http://schemas.microsoft.com/office/powerpoint/2010/main">
-    <mc:Choice Requires="p14">
+  <mc:AlternateContent xmlns:mc="http://schemas.openxmlformats.org/markup-compatibility/2006">
+    <mc:Choice xmlns:p14="http://schemas.microsoft.com/office/powerpoint/2010/main" Requires="p14">
       <p:transition spd="slow" p14:dur="2000"/>
     </mc:Choice>
-    <mc:Fallback xmlns="">
+    <mc:Fallback>
       <p:transition spd="slow"/>
     </mc:Fallback>
   </mc:AlternateContent>
@@ -8047,7 +8063,7 @@
           <a:bodyPr/>
           <a:lstStyle/>
           <a:p>
-            <a:pPr marL="256032" indent="-256032">
+            <a:pPr marL="255905" indent="-255905">
               <a:buSzPct val="100000"/>
             </a:pPr>
             <a:r>
@@ -8056,27 +8072,36 @@
               </a:rPr>
               <a:t>Nature of Strong-Tie Vs. Weak-Tie Relationships</a:t>
             </a:r>
-          </a:p>
-          <a:p>
-            <a:pPr marL="740664" lvl="1" algn="just"/>
+            <a:endParaRPr lang="en-US" sz="2400" b="1" dirty="0" smtClean="0">
+              <a:latin typeface="+mj-lt"/>
+            </a:endParaRPr>
+          </a:p>
+          <a:p>
+            <a:pPr marL="740410" lvl="1" algn="just"/>
             <a:r>
               <a:rPr lang="en-US" sz="2400" dirty="0" smtClean="0">
                 <a:latin typeface="+mj-lt"/>
               </a:rPr>
               <a:t>Strong-tie relationships are characterized by frequent interaction and form between coworkers, friends, and spouses.</a:t>
             </a:r>
-          </a:p>
-          <a:p>
-            <a:pPr marL="740664" lvl="1" algn="just"/>
+            <a:endParaRPr lang="en-US" sz="2400" dirty="0" smtClean="0">
+              <a:latin typeface="+mj-lt"/>
+            </a:endParaRPr>
+          </a:p>
+          <a:p>
+            <a:pPr marL="740410" lvl="1" algn="just"/>
             <a:r>
               <a:rPr lang="en-US" sz="2400" dirty="0" smtClean="0">
                 <a:latin typeface="+mj-lt"/>
               </a:rPr>
               <a:t>Weak-tie relationships are characterized by infrequent interaction and form between casual acquaintances.</a:t>
             </a:r>
-          </a:p>
-          <a:p>
-            <a:pPr marL="256032" indent="-256032">
+            <a:endParaRPr lang="en-US" sz="2400" dirty="0" smtClean="0">
+              <a:latin typeface="+mj-lt"/>
+            </a:endParaRPr>
+          </a:p>
+          <a:p>
+            <a:pPr marL="255905" indent="-255905">
               <a:buSzPct val="100000"/>
             </a:pPr>
             <a:r>
@@ -8085,9 +8110,12 @@
               </a:rPr>
               <a:t>Result</a:t>
             </a:r>
-          </a:p>
-          <a:p>
-            <a:pPr marL="740664" lvl="1" algn="just"/>
+            <a:endParaRPr lang="en-US" sz="2400" b="1" dirty="0" smtClean="0">
+              <a:latin typeface="+mj-lt"/>
+            </a:endParaRPr>
+          </a:p>
+          <a:p>
+            <a:pPr marL="740410" lvl="1" algn="just"/>
             <a:r>
               <a:rPr lang="en-US" sz="2400" dirty="0" smtClean="0">
                 <a:latin typeface="+mj-lt"/>
@@ -8105,11 +8133,11 @@
   <p:clrMapOvr>
     <a:masterClrMapping/>
   </p:clrMapOvr>
-  <mc:AlternateContent xmlns:mc="http://schemas.openxmlformats.org/markup-compatibility/2006" xmlns:p14="http://schemas.microsoft.com/office/powerpoint/2010/main">
-    <mc:Choice Requires="p14">
+  <mc:AlternateContent xmlns:mc="http://schemas.openxmlformats.org/markup-compatibility/2006">
+    <mc:Choice xmlns:p14="http://schemas.microsoft.com/office/powerpoint/2010/main" Requires="p14">
       <p:transition spd="slow" p14:dur="2000"/>
     </mc:Choice>
-    <mc:Fallback xmlns="">
+    <mc:Fallback>
       <p:transition spd="slow"/>
     </mc:Fallback>
   </mc:AlternateContent>
@@ -8210,11 +8238,6 @@
           </p:cNvGraphicFramePr>
           <p:nvPr>
             <p:ph idx="13"/>
-            <p:extLst>
-              <p:ext uri="{D42A27DB-BD31-4B8C-83A1-F6EECF244321}">
-                <p14:modId xmlns:p14="http://schemas.microsoft.com/office/powerpoint/2010/main" val="848175183"/>
-              </p:ext>
-            </p:extLst>
           </p:nvPr>
         </p:nvGraphicFramePr>
         <p:xfrm>
@@ -8228,20 +8251,8 @@
                 <a:tableStyleId>{3B4B98B0-60AC-42C2-AFA5-B58CD77FA1E5}</a:tableStyleId>
               </a:tblPr>
               <a:tblGrid>
-                <a:gridCol w="3943928">
-                  <a:extLst>
-                    <a:ext uri="{9D8B030D-6E8A-4147-A177-3AD203B41FA5}">
-                      <a16:colId xmlns:a16="http://schemas.microsoft.com/office/drawing/2014/main" val="20000"/>
-                    </a:ext>
-                  </a:extLst>
-                </a:gridCol>
-                <a:gridCol w="4057072">
-                  <a:extLst>
-                    <a:ext uri="{9D8B030D-6E8A-4147-A177-3AD203B41FA5}">
-                      <a16:colId xmlns:a16="http://schemas.microsoft.com/office/drawing/2014/main" val="20001"/>
-                    </a:ext>
-                  </a:extLst>
-                </a:gridCol>
+                <a:gridCol w="3943928"/>
+                <a:gridCol w="4057072"/>
               </a:tblGrid>
               <a:tr h="543961">
                 <a:tc>
@@ -8263,13 +8274,13 @@
                         <a:buSzTx/>
                         <a:buFontTx/>
                         <a:buNone/>
-                        <a:tabLst/>
                         <a:defRPr/>
                       </a:pPr>
                       <a:r>
                         <a:rPr lang="en-US" sz="2200" dirty="0" smtClean="0"/>
                         <a:t>Strong-Tie Relationships</a:t>
                       </a:r>
+                      <a:endParaRPr lang="en-US" sz="2200" dirty="0" smtClean="0"/>
                     </a:p>
                   </a:txBody>
                   <a:tcPr marL="92491" marR="92491" marT="46246" marB="46246" anchor="ctr">
@@ -8337,7 +8348,6 @@
                         <a:buSzTx/>
                         <a:buFontTx/>
                         <a:buNone/>
-                        <a:tabLst/>
                         <a:defRPr/>
                       </a:pPr>
                       <a:r>
@@ -8393,11 +8403,6 @@
                     </a:solidFill>
                   </a:tcPr>
                 </a:tc>
-                <a:extLst>
-                  <a:ext uri="{0D108BD9-81ED-4DB2-BD59-A6C34878D82A}">
-                    <a16:rowId xmlns:a16="http://schemas.microsoft.com/office/drawing/2014/main" val="10000"/>
-                  </a:ext>
-                </a:extLst>
               </a:tr>
               <a:tr h="2445093">
                 <a:tc>
@@ -8482,13 +8487,13 @@
                         <a:buSzTx/>
                         <a:buFontTx/>
                         <a:buNone/>
-                        <a:tabLst/>
                         <a:defRPr/>
                       </a:pPr>
                       <a:r>
                         <a:rPr lang="en-US" sz="2200" dirty="0" smtClean="0"/>
                         <a:t>These relationships, which form between casual acquaintances, are not as apt to be between like-minded individuals, so one person may say something to another that sparks a completely new idea.</a:t>
                       </a:r>
+                      <a:endParaRPr lang="en-US" sz="2200" dirty="0" smtClean="0"/>
                     </a:p>
                   </a:txBody>
                   <a:tcPr marL="92491" marR="92491" marT="46246" marB="46246">
@@ -8537,11 +8542,6 @@
                     </a:solidFill>
                   </a:tcPr>
                 </a:tc>
-                <a:extLst>
-                  <a:ext uri="{0D108BD9-81ED-4DB2-BD59-A6C34878D82A}">
-                    <a16:rowId xmlns:a16="http://schemas.microsoft.com/office/drawing/2014/main" val="10001"/>
-                  </a:ext>
-                </a:extLst>
               </a:tr>
             </a:tbl>
           </a:graphicData>
@@ -8552,11 +8552,11 @@
   <p:clrMapOvr>
     <a:masterClrMapping/>
   </p:clrMapOvr>
-  <mc:AlternateContent xmlns:mc="http://schemas.openxmlformats.org/markup-compatibility/2006" xmlns:p14="http://schemas.microsoft.com/office/powerpoint/2010/main">
-    <mc:Choice Requires="p14">
+  <mc:AlternateContent xmlns:mc="http://schemas.openxmlformats.org/markup-compatibility/2006">
+    <mc:Choice xmlns:p14="http://schemas.microsoft.com/office/powerpoint/2010/main" Requires="p14">
       <p:transition spd="slow" p14:dur="2000"/>
     </mc:Choice>
-    <mc:Fallback xmlns="">
+    <mc:Fallback>
       <p:transition spd="slow"/>
     </mc:Fallback>
   </mc:AlternateContent>
@@ -8643,7 +8643,7 @@
           <a:bodyPr/>
           <a:lstStyle/>
           <a:p>
-            <a:pPr marL="256032" indent="-256032">
+            <a:pPr marL="255905" indent="-255905">
               <a:buSzPct val="100000"/>
             </a:pPr>
             <a:r>
@@ -8652,27 +8652,36 @@
               </a:rPr>
               <a:t>Creativity</a:t>
             </a:r>
-          </a:p>
-          <a:p>
-            <a:pPr marL="740664" lvl="1" algn="just"/>
+            <a:endParaRPr lang="en-US" sz="2400" b="1" dirty="0" smtClean="0">
+              <a:latin typeface="+mj-lt"/>
+            </a:endParaRPr>
+          </a:p>
+          <a:p>
+            <a:pPr marL="740410" lvl="1" algn="just"/>
             <a:r>
               <a:rPr lang="en-US" sz="2400" dirty="0" smtClean="0">
                 <a:latin typeface="+mj-lt"/>
               </a:rPr>
               <a:t>Creativity is the process of generating a novel or useful idea.</a:t>
             </a:r>
-          </a:p>
-          <a:p>
-            <a:pPr marL="740664" lvl="1" algn="just"/>
+            <a:endParaRPr lang="en-US" sz="2400" dirty="0" smtClean="0">
+              <a:latin typeface="+mj-lt"/>
+            </a:endParaRPr>
+          </a:p>
+          <a:p>
+            <a:pPr marL="740410" lvl="1" algn="just"/>
             <a:r>
               <a:rPr lang="en-US" sz="2400" dirty="0" smtClean="0">
                 <a:latin typeface="+mj-lt"/>
               </a:rPr>
               <a:t>Opportunity recognition may be, at least in part, a creative process.</a:t>
             </a:r>
-          </a:p>
-          <a:p>
-            <a:pPr marL="740664" lvl="1" algn="just"/>
+            <a:endParaRPr lang="en-US" sz="2400" dirty="0" smtClean="0">
+              <a:latin typeface="+mj-lt"/>
+            </a:endParaRPr>
+          </a:p>
+          <a:p>
+            <a:pPr marL="740410" lvl="1" algn="just"/>
             <a:r>
               <a:rPr lang="en-US" sz="2400" dirty="0" smtClean="0">
                 <a:latin typeface="+mj-lt"/>
@@ -8690,11 +8699,11 @@
   <p:clrMapOvr>
     <a:masterClrMapping/>
   </p:clrMapOvr>
-  <mc:AlternateContent xmlns:mc="http://schemas.openxmlformats.org/markup-compatibility/2006" xmlns:p14="http://schemas.microsoft.com/office/powerpoint/2010/main">
-    <mc:Choice Requires="p14">
+  <mc:AlternateContent xmlns:mc="http://schemas.openxmlformats.org/markup-compatibility/2006">
+    <mc:Choice xmlns:p14="http://schemas.microsoft.com/office/powerpoint/2010/main" Requires="p14">
       <p:transition spd="slow" p14:dur="2000"/>
     </mc:Choice>
-    <mc:Fallback xmlns="">
+    <mc:Fallback>
       <p:transition spd="slow"/>
     </mc:Fallback>
   </mc:AlternateContent>
@@ -8809,7 +8818,7 @@
           <p:nvPr/>
         </p:nvPicPr>
         <p:blipFill>
-          <a:blip r:embed="rId2" cstate="print">
+          <a:blip r:embed="rId1" cstate="print">
             <a:extLst>
               <a:ext uri="{28A0092B-C50C-407E-A947-70E740481C1C}">
                 <a14:useLocalDpi xmlns:a14="http://schemas.microsoft.com/office/drawing/2010/main" val="0"/>
@@ -8835,11 +8844,11 @@
   <p:clrMapOvr>
     <a:masterClrMapping/>
   </p:clrMapOvr>
-  <mc:AlternateContent xmlns:mc="http://schemas.openxmlformats.org/markup-compatibility/2006" xmlns:p14="http://schemas.microsoft.com/office/powerpoint/2010/main">
-    <mc:Choice Requires="p14">
+  <mc:AlternateContent xmlns:mc="http://schemas.openxmlformats.org/markup-compatibility/2006">
+    <mc:Choice xmlns:p14="http://schemas.microsoft.com/office/powerpoint/2010/main" Requires="p14">
       <p:transition spd="slow" p14:dur="2000"/>
     </mc:Choice>
-    <mc:Fallback xmlns="">
+    <mc:Fallback>
       <p:transition spd="slow"/>
     </mc:Fallback>
   </mc:AlternateContent>
@@ -8917,13 +8926,14 @@
           <a:bodyPr/>
           <a:lstStyle/>
           <a:p>
-            <a:pPr marL="256032" indent="-256032" algn="just">
+            <a:pPr marL="255905" indent="-255905" algn="just">
               <a:buSzPct val="100000"/>
             </a:pPr>
             <a:r>
               <a:rPr lang="en-US" sz="2200" dirty="0" smtClean="0"/>
               <a:t>Depicts the connection between an awareness of emerging trends and the personal characteristics of the entrepreneur</a:t>
             </a:r>
+            <a:endParaRPr lang="en-US" sz="2200" dirty="0" smtClean="0"/>
           </a:p>
           <a:p>
             <a:pPr marL="0" indent="285750">
@@ -8951,7 +8961,7 @@
           <p:nvPr/>
         </p:nvPicPr>
         <p:blipFill>
-          <a:blip r:embed="rId2" cstate="print">
+          <a:blip r:embed="rId1" cstate="print">
             <a:extLst>
               <a:ext uri="{28A0092B-C50C-407E-A947-70E740481C1C}">
                 <a14:useLocalDpi xmlns:a14="http://schemas.microsoft.com/office/drawing/2010/main" val="0"/>
@@ -8977,11 +8987,11 @@
   <p:clrMapOvr>
     <a:masterClrMapping/>
   </p:clrMapOvr>
-  <mc:AlternateContent xmlns:mc="http://schemas.openxmlformats.org/markup-compatibility/2006" xmlns:p14="http://schemas.microsoft.com/office/powerpoint/2010/main">
-    <mc:Choice Requires="p14">
+  <mc:AlternateContent xmlns:mc="http://schemas.openxmlformats.org/markup-compatibility/2006">
+    <mc:Choice xmlns:p14="http://schemas.microsoft.com/office/powerpoint/2010/main" Requires="p14">
       <p:transition spd="slow" p14:dur="2000"/>
     </mc:Choice>
-    <mc:Fallback xmlns="">
+    <mc:Fallback>
       <p:transition spd="slow"/>
     </mc:Fallback>
   </mc:AlternateContent>
@@ -9036,6 +9046,7 @@
               <a:rPr lang="en-US" sz="3200" dirty="0"/>
               <a:t>Techniques for Generating Ideas</a:t>
             </a:r>
+            <a:endParaRPr lang="en-US" sz="3200" dirty="0"/>
           </a:p>
         </p:txBody>
       </p:sp>
@@ -9058,12 +9069,14 @@
               <a:rPr lang="en-US" sz="2400" dirty="0" smtClean="0"/>
               <a:t>Brainstorming</a:t>
             </a:r>
+            <a:endParaRPr lang="en-US" sz="2400" dirty="0" smtClean="0"/>
           </a:p>
           <a:p>
             <a:r>
               <a:rPr lang="en-US" sz="2400" dirty="0" smtClean="0"/>
               <a:t>Focus Groups</a:t>
             </a:r>
+            <a:endParaRPr lang="en-US" sz="2400" dirty="0" smtClean="0"/>
           </a:p>
           <a:p>
             <a:r>
@@ -9079,11 +9092,11 @@
   <p:clrMapOvr>
     <a:masterClrMapping/>
   </p:clrMapOvr>
-  <mc:AlternateContent xmlns:mc="http://schemas.openxmlformats.org/markup-compatibility/2006" xmlns:p14="http://schemas.microsoft.com/office/powerpoint/2010/main">
-    <mc:Choice Requires="p14">
+  <mc:AlternateContent xmlns:mc="http://schemas.openxmlformats.org/markup-compatibility/2006">
+    <mc:Choice xmlns:p14="http://schemas.microsoft.com/office/powerpoint/2010/main" Requires="p14">
       <p:transition spd="slow" p14:dur="2000"/>
     </mc:Choice>
-    <mc:Fallback xmlns="">
+    <mc:Fallback>
       <p:transition spd="slow"/>
     </mc:Fallback>
   </mc:AlternateContent>
@@ -9162,7 +9175,7 @@
           <a:bodyPr/>
           <a:lstStyle/>
           <a:p>
-            <a:pPr marL="256032" indent="-256032">
+            <a:pPr marL="255905" indent="-255905">
               <a:buSzPct val="100000"/>
             </a:pPr>
             <a:r>
@@ -9171,18 +9184,24 @@
               </a:rPr>
               <a:t>Brainstorming</a:t>
             </a:r>
-          </a:p>
-          <a:p>
-            <a:pPr marL="740664" lvl="1" algn="just"/>
+            <a:endParaRPr lang="en-US" sz="2400" b="1" dirty="0" smtClean="0">
+              <a:latin typeface="+mj-lt"/>
+            </a:endParaRPr>
+          </a:p>
+          <a:p>
+            <a:pPr marL="740410" lvl="1" algn="just"/>
             <a:r>
               <a:rPr lang="en-US" sz="2400" dirty="0" smtClean="0">
                 <a:latin typeface="+mj-lt"/>
               </a:rPr>
               <a:t>Is the process of generating several ideas about a specific topic.</a:t>
             </a:r>
-          </a:p>
-          <a:p>
-            <a:pPr marL="740664" lvl="1" algn="just"/>
+            <a:endParaRPr lang="en-US" sz="2400" dirty="0" smtClean="0">
+              <a:latin typeface="+mj-lt"/>
+            </a:endParaRPr>
+          </a:p>
+          <a:p>
+            <a:pPr marL="740410" lvl="1" algn="just"/>
             <a:r>
               <a:rPr lang="en-US" sz="2400" dirty="0" smtClean="0">
                 <a:latin typeface="+mj-lt"/>
@@ -9213,15 +9232,21 @@
               </a:rPr>
               <a:t> typically involves a group of people, and should be targeted to a specific topic.</a:t>
             </a:r>
-          </a:p>
-          <a:p>
-            <a:pPr marL="740664" lvl="1"/>
+            <a:endParaRPr lang="en-US" sz="2400" dirty="0" smtClean="0">
+              <a:latin typeface="+mj-lt"/>
+            </a:endParaRPr>
+          </a:p>
+          <a:p>
+            <a:pPr marL="740410" lvl="1"/>
             <a:r>
               <a:rPr lang="en-US" sz="2400" dirty="0" smtClean="0">
                 <a:latin typeface="+mj-lt"/>
               </a:rPr>
               <a:t>Rules for a brainstorming session:</a:t>
             </a:r>
+            <a:endParaRPr lang="en-US" sz="2400" dirty="0" smtClean="0">
+              <a:latin typeface="+mj-lt"/>
+            </a:endParaRPr>
           </a:p>
           <a:p>
             <a:pPr lvl="2"/>
@@ -9231,6 +9256,9 @@
               </a:rPr>
               <a:t>No criticism.</a:t>
             </a:r>
+            <a:endParaRPr lang="en-US" sz="2200" dirty="0" smtClean="0">
+              <a:latin typeface="+mj-lt"/>
+            </a:endParaRPr>
           </a:p>
           <a:p>
             <a:pPr lvl="2"/>
@@ -9240,6 +9268,9 @@
               </a:rPr>
               <a:t>Freewheeling is encouraged.</a:t>
             </a:r>
+            <a:endParaRPr lang="en-US" sz="2200" dirty="0" smtClean="0">
+              <a:latin typeface="+mj-lt"/>
+            </a:endParaRPr>
           </a:p>
           <a:p>
             <a:pPr lvl="2"/>
@@ -9249,6 +9280,9 @@
               </a:rPr>
               <a:t>The session should move quickly.</a:t>
             </a:r>
+            <a:endParaRPr lang="en-US" sz="2200" dirty="0" smtClean="0">
+              <a:latin typeface="+mj-lt"/>
+            </a:endParaRPr>
           </a:p>
           <a:p>
             <a:pPr lvl="2"/>
@@ -9269,11 +9303,11 @@
   <p:clrMapOvr>
     <a:masterClrMapping/>
   </p:clrMapOvr>
-  <mc:AlternateContent xmlns:mc="http://schemas.openxmlformats.org/markup-compatibility/2006" xmlns:p14="http://schemas.microsoft.com/office/powerpoint/2010/main">
-    <mc:Choice Requires="p14">
+  <mc:AlternateContent xmlns:mc="http://schemas.openxmlformats.org/markup-compatibility/2006">
+    <mc:Choice xmlns:p14="http://schemas.microsoft.com/office/powerpoint/2010/main" Requires="p14">
       <p:transition spd="slow" p14:dur="2000"/>
     </mc:Choice>
-    <mc:Fallback xmlns="">
+    <mc:Fallback>
       <p:transition spd="slow"/>
     </mc:Fallback>
   </mc:AlternateContent>
@@ -9362,6 +9396,7 @@
               <a:rPr lang="en-US" sz="2400" b="1" dirty="0" smtClean="0"/>
               <a:t>Defined</a:t>
             </a:r>
+            <a:endParaRPr lang="en-US" sz="2400" b="1" dirty="0" smtClean="0"/>
           </a:p>
           <a:p>
             <a:pPr algn="just"/>
@@ -9378,11 +9413,11 @@
   <p:clrMapOvr>
     <a:masterClrMapping/>
   </p:clrMapOvr>
-  <mc:AlternateContent xmlns:mc="http://schemas.openxmlformats.org/markup-compatibility/2006" xmlns:p14="http://schemas.microsoft.com/office/powerpoint/2010/main">
-    <mc:Choice Requires="p14">
+  <mc:AlternateContent xmlns:mc="http://schemas.openxmlformats.org/markup-compatibility/2006">
+    <mc:Choice xmlns:p14="http://schemas.microsoft.com/office/powerpoint/2010/main" Requires="p14">
       <p:transition spd="slow" p14:dur="2000"/>
     </mc:Choice>
-    <mc:Fallback xmlns="">
+    <mc:Fallback>
       <p:transition spd="slow"/>
     </mc:Fallback>
   </mc:AlternateContent>
@@ -9461,7 +9496,7 @@
           <a:bodyPr/>
           <a:lstStyle/>
           <a:p>
-            <a:pPr marL="256032" indent="-256032">
+            <a:pPr marL="255905" indent="-255905">
               <a:buSzPct val="100000"/>
             </a:pPr>
             <a:r>
@@ -9470,24 +9505,33 @@
               </a:rPr>
               <a:t>Focus Group</a:t>
             </a:r>
-          </a:p>
-          <a:p>
-            <a:pPr marL="740664" lvl="1" algn="just"/>
+            <a:endParaRPr lang="en-US" sz="2400" b="1" dirty="0" smtClean="0">
+              <a:latin typeface="+mj-lt"/>
+            </a:endParaRPr>
+          </a:p>
+          <a:p>
+            <a:pPr marL="740410" lvl="1" algn="just"/>
             <a:r>
               <a:rPr lang="en-US" sz="2400" dirty="0" smtClean="0">
                 <a:latin typeface="+mj-lt"/>
               </a:rPr>
               <a:t>Focus groups involve a group of people who are familiar with a topic, are brought together to respond to questions, and who are able to shed light on an issue through the give-and-take nature of group discussions.</a:t>
             </a:r>
-          </a:p>
-          <a:p>
-            <a:pPr marL="740664" lvl="1" algn="just"/>
+            <a:endParaRPr lang="en-US" sz="2400" dirty="0" smtClean="0">
+              <a:latin typeface="+mj-lt"/>
+            </a:endParaRPr>
+          </a:p>
+          <a:p>
+            <a:pPr marL="740410" lvl="1" algn="just"/>
             <a:r>
               <a:rPr lang="en-US" sz="2400" dirty="0" smtClean="0">
                 <a:latin typeface="+mj-lt"/>
               </a:rPr>
               <a:t>They work best as a follow-up to brainstorming, when the general idea for a business has been formulated but further refinement of the idea is needed.</a:t>
             </a:r>
+            <a:endParaRPr lang="en-US" sz="2400" dirty="0" smtClean="0">
+              <a:latin typeface="+mj-lt"/>
+            </a:endParaRPr>
           </a:p>
         </p:txBody>
       </p:sp>
@@ -9496,11 +9540,11 @@
   <p:clrMapOvr>
     <a:masterClrMapping/>
   </p:clrMapOvr>
-  <mc:AlternateContent xmlns:mc="http://schemas.openxmlformats.org/markup-compatibility/2006" xmlns:p14="http://schemas.microsoft.com/office/powerpoint/2010/main">
-    <mc:Choice Requires="p14">
+  <mc:AlternateContent xmlns:mc="http://schemas.openxmlformats.org/markup-compatibility/2006">
+    <mc:Choice xmlns:p14="http://schemas.microsoft.com/office/powerpoint/2010/main" Requires="p14">
       <p:transition spd="slow" p14:dur="2000"/>
     </mc:Choice>
-    <mc:Fallback xmlns="">
+    <mc:Fallback>
       <p:transition spd="slow"/>
     </mc:Fallback>
   </mc:AlternateContent>
@@ -9583,7 +9627,7 @@
           <a:bodyPr/>
           <a:lstStyle/>
           <a:p>
-            <a:pPr marL="256032" indent="-256032">
+            <a:pPr marL="255905" indent="-255905">
               <a:buSzPct val="100000"/>
             </a:pPr>
             <a:r>
@@ -9592,27 +9636,36 @@
               </a:rPr>
               <a:t>Library Research</a:t>
             </a:r>
-          </a:p>
-          <a:p>
-            <a:pPr marL="740664" lvl="1" algn="just"/>
+            <a:endParaRPr lang="en-US" sz="2400" b="1" dirty="0" smtClean="0">
+              <a:latin typeface="+mj-lt"/>
+            </a:endParaRPr>
+          </a:p>
+          <a:p>
+            <a:pPr marL="740410" lvl="1" algn="just"/>
             <a:r>
               <a:rPr lang="en-US" sz="2400" dirty="0" smtClean="0">
                 <a:latin typeface="+mj-lt"/>
               </a:rPr>
               <a:t>Libraries are an often underutilized source of information for generating new business ideas.</a:t>
             </a:r>
-          </a:p>
-          <a:p>
-            <a:pPr marL="740664" lvl="1" algn="just"/>
+            <a:endParaRPr lang="en-US" sz="2400" dirty="0" smtClean="0">
+              <a:latin typeface="+mj-lt"/>
+            </a:endParaRPr>
+          </a:p>
+          <a:p>
+            <a:pPr marL="740410" lvl="1" algn="just"/>
             <a:r>
               <a:rPr lang="en-US" sz="2400" dirty="0" smtClean="0">
                 <a:latin typeface="+mj-lt"/>
               </a:rPr>
               <a:t>The best approach is to talk to a reference librarian, who can point out useful resources, such as industry-specific magazines, trade journals, and industry reports.</a:t>
             </a:r>
-          </a:p>
-          <a:p>
-            <a:pPr marL="740664" lvl="1" algn="just"/>
+            <a:endParaRPr lang="en-US" sz="2400" dirty="0" smtClean="0">
+              <a:latin typeface="+mj-lt"/>
+            </a:endParaRPr>
+          </a:p>
+          <a:p>
+            <a:pPr marL="740410" lvl="1" algn="just"/>
             <a:r>
               <a:rPr lang="en-US" sz="2400" dirty="0" smtClean="0">
                 <a:latin typeface="+mj-lt"/>
@@ -9630,11 +9683,11 @@
   <p:clrMapOvr>
     <a:masterClrMapping/>
   </p:clrMapOvr>
-  <mc:AlternateContent xmlns:mc="http://schemas.openxmlformats.org/markup-compatibility/2006" xmlns:p14="http://schemas.microsoft.com/office/powerpoint/2010/main">
-    <mc:Choice Requires="p14">
+  <mc:AlternateContent xmlns:mc="http://schemas.openxmlformats.org/markup-compatibility/2006">
+    <mc:Choice xmlns:p14="http://schemas.microsoft.com/office/powerpoint/2010/main" Requires="p14">
       <p:transition spd="slow" p14:dur="2000"/>
     </mc:Choice>
-    <mc:Fallback xmlns="">
+    <mc:Fallback>
       <p:transition spd="slow"/>
     </mc:Fallback>
   </mc:AlternateContent>
@@ -9764,6 +9817,7 @@
               <a:rPr lang="en-US" sz="2400" dirty="0" smtClean="0"/>
               <a:t>.</a:t>
             </a:r>
+            <a:endParaRPr lang="en-US" sz="2400" dirty="0" smtClean="0"/>
           </a:p>
           <a:p>
             <a:pPr marL="0" indent="0">
@@ -9773,6 +9827,7 @@
               <a:rPr lang="en-US" sz="2400" b="1" dirty="0"/>
               <a:t>Examples of Useful Search Engines and Industry Reports</a:t>
             </a:r>
+            <a:endParaRPr lang="en-US" sz="2400" b="1" dirty="0"/>
           </a:p>
           <a:p>
             <a:pPr>
@@ -9836,11 +9891,11 @@
   <p:clrMapOvr>
     <a:masterClrMapping/>
   </p:clrMapOvr>
-  <mc:AlternateContent xmlns:mc="http://schemas.openxmlformats.org/markup-compatibility/2006" xmlns:p14="http://schemas.microsoft.com/office/powerpoint/2010/main">
-    <mc:Choice Requires="p14">
+  <mc:AlternateContent xmlns:mc="http://schemas.openxmlformats.org/markup-compatibility/2006">
+    <mc:Choice xmlns:p14="http://schemas.microsoft.com/office/powerpoint/2010/main" Requires="p14">
       <p:transition spd="slow" p14:dur="2000"/>
     </mc:Choice>
-    <mc:Fallback xmlns="">
+    <mc:Fallback>
       <p:transition spd="slow"/>
     </mc:Fallback>
   </mc:AlternateContent>
@@ -9923,7 +9978,7 @@
           <a:bodyPr/>
           <a:lstStyle/>
           <a:p>
-            <a:pPr marL="256032" indent="-256032">
+            <a:pPr marL="255905" indent="-255905">
               <a:buSzPct val="100000"/>
             </a:pPr>
             <a:r>
@@ -9932,9 +9987,12 @@
               </a:rPr>
               <a:t>Internet Research</a:t>
             </a:r>
-          </a:p>
-          <a:p>
-            <a:pPr marL="740664" lvl="1" algn="just"/>
+            <a:endParaRPr lang="en-US" sz="2400" b="1" dirty="0" smtClean="0">
+              <a:latin typeface="+mj-lt"/>
+            </a:endParaRPr>
+          </a:p>
+          <a:p>
+            <a:pPr marL="740410" lvl="1" algn="just"/>
             <a:r>
               <a:rPr lang="en-US" sz="2400" dirty="0" smtClean="0">
                 <a:latin typeface="+mj-lt"/>
@@ -9989,18 +10047,24 @@
               </a:rPr>
               <a:t> and “latest” new business ideas.</a:t>
             </a:r>
-          </a:p>
-          <a:p>
-            <a:pPr marL="740664" lvl="1" algn="just"/>
+            <a:endParaRPr lang="en-US" sz="2400" dirty="0" smtClean="0">
+              <a:latin typeface="+mj-lt"/>
+            </a:endParaRPr>
+          </a:p>
+          <a:p>
+            <a:pPr marL="740410" lvl="1" algn="just"/>
             <a:r>
               <a:rPr lang="en-US" sz="2400" dirty="0" smtClean="0">
                 <a:latin typeface="+mj-lt"/>
               </a:rPr>
               <a:t>If you have a specific topic in mind, setting up Google mail alerts will provide you with links to a constant stream of newspaper articles, blog posts, and news releases about the topic.</a:t>
             </a:r>
-          </a:p>
-          <a:p>
-            <a:pPr marL="740664" lvl="1" algn="just"/>
+            <a:endParaRPr lang="en-US" sz="2400" dirty="0" smtClean="0">
+              <a:latin typeface="+mj-lt"/>
+            </a:endParaRPr>
+          </a:p>
+          <a:p>
+            <a:pPr marL="740410" lvl="1" algn="just"/>
             <a:r>
               <a:rPr lang="en-US" sz="2400" dirty="0" smtClean="0">
                 <a:latin typeface="+mj-lt"/>
@@ -10018,11 +10082,11 @@
   <p:clrMapOvr>
     <a:masterClrMapping/>
   </p:clrMapOvr>
-  <mc:AlternateContent xmlns:mc="http://schemas.openxmlformats.org/markup-compatibility/2006" xmlns:p14="http://schemas.microsoft.com/office/powerpoint/2010/main">
-    <mc:Choice Requires="p14">
+  <mc:AlternateContent xmlns:mc="http://schemas.openxmlformats.org/markup-compatibility/2006">
+    <mc:Choice xmlns:p14="http://schemas.microsoft.com/office/powerpoint/2010/main" Requires="p14">
       <p:transition spd="slow" p14:dur="2000"/>
     </mc:Choice>
-    <mc:Fallback xmlns="">
+    <mc:Fallback>
       <p:transition spd="slow"/>
     </mc:Fallback>
   </mc:AlternateContent>
@@ -10101,7 +10165,7 @@
           <a:bodyPr/>
           <a:lstStyle/>
           <a:p>
-            <a:pPr marL="256032" indent="-256032">
+            <a:pPr marL="255905" indent="-255905">
               <a:buSzPct val="100000"/>
             </a:pPr>
             <a:r>
@@ -10110,18 +10174,24 @@
               </a:rPr>
               <a:t>Customer Advisory Boards</a:t>
             </a:r>
-          </a:p>
-          <a:p>
-            <a:pPr marL="740664" lvl="1" indent="-283464" algn="just"/>
+            <a:endParaRPr lang="en-US" sz="2400" b="1" dirty="0" smtClean="0">
+              <a:latin typeface="+mj-lt"/>
+            </a:endParaRPr>
+          </a:p>
+          <a:p>
+            <a:pPr marL="740410" lvl="1" indent="-283210" algn="just"/>
             <a:r>
               <a:rPr lang="en-US" sz="2400" dirty="0" smtClean="0">
                 <a:latin typeface="+mj-lt"/>
               </a:rPr>
               <a:t>Some companies set up customer advisory boards that meet regularly to discuss needs, wants, and problems that may lead to new ideas.</a:t>
             </a:r>
-          </a:p>
-          <a:p>
-            <a:pPr marL="256032" indent="-256032">
+            <a:endParaRPr lang="en-US" sz="2400" dirty="0" smtClean="0">
+              <a:latin typeface="+mj-lt"/>
+            </a:endParaRPr>
+          </a:p>
+          <a:p>
+            <a:pPr marL="255905" indent="-255905">
               <a:buSzPct val="100000"/>
             </a:pPr>
             <a:r>
@@ -10130,9 +10200,12 @@
               </a:rPr>
               <a:t>Day-In-The-Life Research</a:t>
             </a:r>
-          </a:p>
-          <a:p>
-            <a:pPr marL="740664" lvl="1" algn="just"/>
+            <a:endParaRPr lang="en-US" sz="2400" b="1" dirty="0" smtClean="0">
+              <a:latin typeface="+mj-lt"/>
+            </a:endParaRPr>
+          </a:p>
+          <a:p>
+            <a:pPr marL="740410" lvl="1" algn="just"/>
             <a:r>
               <a:rPr lang="en-US" sz="2400" dirty="0" smtClean="0">
                 <a:latin typeface="+mj-lt"/>
@@ -10150,11 +10223,11 @@
   <p:clrMapOvr>
     <a:masterClrMapping/>
   </p:clrMapOvr>
-  <mc:AlternateContent xmlns:mc="http://schemas.openxmlformats.org/markup-compatibility/2006" xmlns:p14="http://schemas.microsoft.com/office/powerpoint/2010/main">
-    <mc:Choice Requires="p14">
+  <mc:AlternateContent xmlns:mc="http://schemas.openxmlformats.org/markup-compatibility/2006">
+    <mc:Choice xmlns:p14="http://schemas.microsoft.com/office/powerpoint/2010/main" Requires="p14">
       <p:transition spd="slow" p14:dur="2000"/>
     </mc:Choice>
-    <mc:Fallback xmlns="">
+    <mc:Fallback>
       <p:transition spd="slow"/>
     </mc:Fallback>
   </mc:AlternateContent>
@@ -10215,20 +10288,15 @@
         </p:txBody>
       </p:sp>
     </p:spTree>
-    <p:extLst>
-      <p:ext uri="{BB962C8B-B14F-4D97-AF65-F5344CB8AC3E}">
-        <p14:creationId xmlns:p14="http://schemas.microsoft.com/office/powerpoint/2010/main" val="2602687700"/>
-      </p:ext>
-    </p:extLst>
   </p:cSld>
   <p:clrMapOvr>
     <a:masterClrMapping/>
   </p:clrMapOvr>
-  <mc:AlternateContent xmlns:mc="http://schemas.openxmlformats.org/markup-compatibility/2006" xmlns:p14="http://schemas.microsoft.com/office/powerpoint/2010/main">
-    <mc:Choice Requires="p14">
+  <mc:AlternateContent xmlns:mc="http://schemas.openxmlformats.org/markup-compatibility/2006">
+    <mc:Choice xmlns:p14="http://schemas.microsoft.com/office/powerpoint/2010/main" Requires="p14">
       <p:transition spd="slow" p14:dur="2000"/>
     </mc:Choice>
-    <mc:Fallback xmlns="">
+    <mc:Fallback>
       <p:transition spd="slow"/>
     </mc:Fallback>
   </mc:AlternateContent>
@@ -10339,7 +10407,7 @@
           <p:nvPr/>
         </p:nvPicPr>
         <p:blipFill>
-          <a:blip r:embed="rId2" cstate="print">
+          <a:blip r:embed="rId1" cstate="print">
             <a:extLst>
               <a:ext uri="{28A0092B-C50C-407E-A947-70E740481C1C}">
                 <a14:useLocalDpi xmlns:a14="http://schemas.microsoft.com/office/drawing/2010/main" val="0"/>
@@ -10365,11 +10433,11 @@
   <p:clrMapOvr>
     <a:masterClrMapping/>
   </p:clrMapOvr>
-  <mc:AlternateContent xmlns:mc="http://schemas.openxmlformats.org/markup-compatibility/2006" xmlns:p14="http://schemas.microsoft.com/office/powerpoint/2010/main">
-    <mc:Choice Requires="p14">
+  <mc:AlternateContent xmlns:mc="http://schemas.openxmlformats.org/markup-compatibility/2006">
+    <mc:Choice xmlns:p14="http://schemas.microsoft.com/office/powerpoint/2010/main" Requires="p14">
       <p:transition spd="slow" p14:dur="2000"/>
     </mc:Choice>
-    <mc:Fallback xmlns="">
+    <mc:Fallback>
       <p:transition spd="slow"/>
     </mc:Fallback>
   </mc:AlternateContent>
@@ -10436,6 +10504,7 @@
               <a:rPr lang="en-IN" sz="3200" dirty="0"/>
               <a:t>Opportunity</a:t>
             </a:r>
+            <a:endParaRPr lang="en-IN" sz="3200" dirty="0"/>
           </a:p>
         </p:txBody>
       </p:sp>
@@ -10448,7 +10517,7 @@
           <p:nvPr/>
         </p:nvPicPr>
         <p:blipFill>
-          <a:blip r:embed="rId2" cstate="print">
+          <a:blip r:embed="rId1" cstate="print">
             <a:extLst>
               <a:ext uri="{28A0092B-C50C-407E-A947-70E740481C1C}">
                 <a14:useLocalDpi xmlns:a14="http://schemas.microsoft.com/office/drawing/2010/main" val="0"/>
@@ -10474,11 +10543,11 @@
   <p:clrMapOvr>
     <a:masterClrMapping/>
   </p:clrMapOvr>
-  <mc:AlternateContent xmlns:mc="http://schemas.openxmlformats.org/markup-compatibility/2006" xmlns:p14="http://schemas.microsoft.com/office/powerpoint/2010/main">
-    <mc:Choice Requires="p14">
+  <mc:AlternateContent xmlns:mc="http://schemas.openxmlformats.org/markup-compatibility/2006">
+    <mc:Choice xmlns:p14="http://schemas.microsoft.com/office/powerpoint/2010/main" Requires="p14">
       <p:transition spd="slow" p14:dur="2000"/>
     </mc:Choice>
-    <mc:Fallback xmlns="">
+    <mc:Fallback>
       <p:transition spd="slow"/>
     </mc:Fallback>
   </mc:AlternateContent>
@@ -10561,7 +10630,7 @@
           <a:bodyPr/>
           <a:lstStyle/>
           <a:p>
-            <a:pPr marL="256032" indent="-256032">
+            <a:pPr marL="255905" indent="-255905">
               <a:buSzPct val="100000"/>
             </a:pPr>
             <a:r>
@@ -10570,24 +10639,33 @@
               </a:rPr>
               <a:t>Observing Trends</a:t>
             </a:r>
-          </a:p>
-          <a:p>
-            <a:pPr marL="740664" lvl="1"/>
+            <a:endParaRPr lang="en-US" sz="2400" b="1" dirty="0" smtClean="0">
+              <a:latin typeface="+mj-lt"/>
+            </a:endParaRPr>
+          </a:p>
+          <a:p>
+            <a:pPr marL="740410" lvl="1"/>
             <a:r>
               <a:rPr lang="en-US" sz="2400" dirty="0" smtClean="0">
                 <a:latin typeface="+mj-lt"/>
               </a:rPr>
               <a:t>Trends create opportunities for entrepreneurs to pursue.</a:t>
             </a:r>
-          </a:p>
-          <a:p>
-            <a:pPr marL="740664" lvl="1"/>
+            <a:endParaRPr lang="en-US" sz="2400" dirty="0" smtClean="0">
+              <a:latin typeface="+mj-lt"/>
+            </a:endParaRPr>
+          </a:p>
+          <a:p>
+            <a:pPr marL="740410" lvl="1"/>
             <a:r>
               <a:rPr lang="en-US" sz="2400" dirty="0" smtClean="0">
                 <a:latin typeface="+mj-lt"/>
               </a:rPr>
               <a:t>The most important trends are:</a:t>
             </a:r>
+            <a:endParaRPr lang="en-US" sz="2400" dirty="0" smtClean="0">
+              <a:latin typeface="+mj-lt"/>
+            </a:endParaRPr>
           </a:p>
           <a:p>
             <a:pPr lvl="2"/>
@@ -10597,6 +10675,9 @@
               </a:rPr>
               <a:t>Economic forces</a:t>
             </a:r>
+            <a:endParaRPr lang="en-US" sz="2200" dirty="0" smtClean="0">
+              <a:latin typeface="+mj-lt"/>
+            </a:endParaRPr>
           </a:p>
           <a:p>
             <a:pPr lvl="2"/>
@@ -10606,6 +10687,9 @@
               </a:rPr>
               <a:t>Social forces</a:t>
             </a:r>
+            <a:endParaRPr lang="en-US" sz="2200" dirty="0" smtClean="0">
+              <a:latin typeface="+mj-lt"/>
+            </a:endParaRPr>
           </a:p>
           <a:p>
             <a:pPr lvl="2"/>
@@ -10615,6 +10699,9 @@
               </a:rPr>
               <a:t>Technological advances</a:t>
             </a:r>
+            <a:endParaRPr lang="en-US" sz="2200" dirty="0" smtClean="0">
+              <a:latin typeface="+mj-lt"/>
+            </a:endParaRPr>
           </a:p>
           <a:p>
             <a:pPr lvl="2"/>
@@ -10624,9 +10711,12 @@
               </a:rPr>
               <a:t>Political and regulatory changes</a:t>
             </a:r>
-          </a:p>
-          <a:p>
-            <a:pPr marL="740664" lvl="1"/>
+            <a:endParaRPr lang="en-US" sz="2200" dirty="0" smtClean="0">
+              <a:latin typeface="+mj-lt"/>
+            </a:endParaRPr>
+          </a:p>
+          <a:p>
+            <a:pPr marL="740410" lvl="1"/>
             <a:r>
               <a:rPr lang="en-US" sz="2400" dirty="0" smtClean="0">
                 <a:latin typeface="+mj-lt"/>
@@ -10656,11 +10746,11 @@
   <p:clrMapOvr>
     <a:masterClrMapping/>
   </p:clrMapOvr>
-  <mc:AlternateContent xmlns:mc="http://schemas.openxmlformats.org/markup-compatibility/2006" xmlns:p14="http://schemas.microsoft.com/office/powerpoint/2010/main">
-    <mc:Choice Requires="p14">
+  <mc:AlternateContent xmlns:mc="http://schemas.openxmlformats.org/markup-compatibility/2006">
+    <mc:Choice xmlns:p14="http://schemas.microsoft.com/office/powerpoint/2010/main" Requires="p14">
       <p:transition spd="slow" p14:dur="2000"/>
     </mc:Choice>
-    <mc:Fallback xmlns="">
+    <mc:Fallback>
       <p:transition spd="slow"/>
     </mc:Fallback>
   </mc:AlternateContent>
@@ -10754,6 +10844,7 @@
               <a:rPr lang="en-US" sz="2200" dirty="0" smtClean="0"/>
               <a:t> Environmental Trends Suggesting Business, Product, or Service Opportunity Gaps</a:t>
             </a:r>
+            <a:endParaRPr lang="en-US" sz="2200" dirty="0" smtClean="0"/>
           </a:p>
         </p:txBody>
       </p:sp>
@@ -10766,7 +10857,7 @@
           <p:nvPr/>
         </p:nvPicPr>
         <p:blipFill>
-          <a:blip r:embed="rId2" cstate="print">
+          <a:blip r:embed="rId1" cstate="print">
             <a:extLst>
               <a:ext uri="{28A0092B-C50C-407E-A947-70E740481C1C}">
                 <a14:useLocalDpi xmlns:a14="http://schemas.microsoft.com/office/drawing/2010/main" val="0"/>
@@ -10792,11 +10883,11 @@
   <p:clrMapOvr>
     <a:masterClrMapping/>
   </p:clrMapOvr>
-  <mc:AlternateContent xmlns:mc="http://schemas.openxmlformats.org/markup-compatibility/2006" xmlns:p14="http://schemas.microsoft.com/office/powerpoint/2010/main">
-    <mc:Choice Requires="p14">
+  <mc:AlternateContent xmlns:mc="http://schemas.openxmlformats.org/markup-compatibility/2006">
+    <mc:Choice xmlns:p14="http://schemas.microsoft.com/office/powerpoint/2010/main" Requires="p14">
       <p:transition spd="slow" p14:dur="2000"/>
     </mc:Choice>
-    <mc:Fallback xmlns="">
+    <mc:Fallback>
       <p:transition spd="slow"/>
     </mc:Fallback>
   </mc:AlternateContent>
@@ -10885,6 +10976,7 @@
               <a:rPr lang="en-US" sz="2400" dirty="0" smtClean="0"/>
               <a:t>Economic trends help determine areas that are ripe for new start-ups and areas that start-ups should avoid.</a:t>
             </a:r>
+            <a:endParaRPr lang="en-US" sz="2400" dirty="0" smtClean="0"/>
           </a:p>
           <a:p>
             <a:pPr marL="0" indent="0">
@@ -10894,6 +10986,7 @@
               <a:rPr lang="en-US" sz="2400" b="1" dirty="0"/>
               <a:t>Example of Economic Trend Creating a Favorable Opportunity</a:t>
             </a:r>
+            <a:endParaRPr lang="en-US" sz="2400" b="1" dirty="0"/>
           </a:p>
           <a:p>
             <a:pPr>
@@ -10904,6 +10997,7 @@
               <a:rPr lang="en-US" sz="2400" dirty="0"/>
               <a:t>A weak economy favors start-ups that help consumers save money.</a:t>
             </a:r>
+            <a:endParaRPr lang="en-US" sz="2400" dirty="0"/>
           </a:p>
           <a:p>
             <a:pPr>
@@ -10931,11 +11025,11 @@
   <p:clrMapOvr>
     <a:masterClrMapping/>
   </p:clrMapOvr>
-  <mc:AlternateContent xmlns:mc="http://schemas.openxmlformats.org/markup-compatibility/2006" xmlns:p14="http://schemas.microsoft.com/office/powerpoint/2010/main">
-    <mc:Choice Requires="p14">
+  <mc:AlternateContent xmlns:mc="http://schemas.openxmlformats.org/markup-compatibility/2006">
+    <mc:Choice xmlns:p14="http://schemas.microsoft.com/office/powerpoint/2010/main" Requires="p14">
       <p:transition spd="slow" p14:dur="2000"/>
     </mc:Choice>
-    <mc:Fallback xmlns="">
+    <mc:Fallback>
       <p:transition spd="slow"/>
     </mc:Fallback>
   </mc:AlternateContent>
@@ -11024,6 +11118,7 @@
               <a:rPr lang="en-US" sz="2400" dirty="0" smtClean="0"/>
               <a:t>Social trends alter how people and businesses behave and set their priorities. These trends provide opportunities for new businesses to accommodate the changes.</a:t>
             </a:r>
+            <a:endParaRPr lang="en-US" sz="2400" dirty="0" smtClean="0"/>
           </a:p>
           <a:p>
             <a:pPr>
@@ -11033,6 +11128,7 @@
               <a:rPr lang="en-US" sz="2400" b="1" dirty="0"/>
               <a:t>Examples of Social Trends</a:t>
             </a:r>
+            <a:endParaRPr lang="en-US" sz="2400" b="1" dirty="0"/>
           </a:p>
           <a:p>
             <a:pPr>
@@ -11046,6 +11142,7 @@
               <a:rPr lang="en-US" sz="2200" dirty="0"/>
               <a:t>Aging of the population.</a:t>
             </a:r>
+            <a:endParaRPr lang="en-US" sz="2200" dirty="0"/>
           </a:p>
           <a:p>
             <a:pPr>
@@ -11099,6 +11196,7 @@
               <a:rPr lang="en-US" sz="2200" dirty="0"/>
               <a:t>of mobile devices.</a:t>
             </a:r>
+            <a:endParaRPr lang="en-US" sz="2200" dirty="0"/>
           </a:p>
           <a:p>
             <a:pPr>
@@ -11125,11 +11223,11 @@
   <p:clrMapOvr>
     <a:masterClrMapping/>
   </p:clrMapOvr>
-  <mc:AlternateContent xmlns:mc="http://schemas.openxmlformats.org/markup-compatibility/2006" xmlns:p14="http://schemas.microsoft.com/office/powerpoint/2010/main">
-    <mc:Choice Requires="p14">
+  <mc:AlternateContent xmlns:mc="http://schemas.openxmlformats.org/markup-compatibility/2006">
+    <mc:Choice xmlns:p14="http://schemas.microsoft.com/office/powerpoint/2010/main" Requires="p14">
       <p:transition spd="slow" p14:dur="2000"/>
     </mc:Choice>
-    <mc:Fallback xmlns="">
+    <mc:Fallback>
       <p:transition spd="slow"/>
     </mc:Fallback>
   </mc:AlternateContent>
@@ -11492,7 +11590,11 @@
       </a:lstStyle>
     </a:txDef>
   </a:objectDefaults>
-  <a:extraClrSchemeLst/>
+  <a:extLst>
+    <a:ext uri="{05A4C25C-085E-4340-85A3-A5531E510DB2}">
+      <thm15:themeFamily xmlns:thm15="http://schemas.microsoft.com/office/thememl/2012/main" name="Office Theme" id="{62F939B6-93AF-4DB8-9C6B-D6C7DFDC589F}" vid="{4A3C46E8-61CC-4603-A589-7422A47A8E4A}"/>
+    </a:ext>
+  </a:extLst>
 </a:theme>
 </file>
 
@@ -11776,8 +11878,11 @@
       </a:bgFillStyleLst>
     </a:fmtScheme>
   </a:themeElements>
-  <a:objectDefaults/>
-  <a:extraClrSchemeLst/>
+  <a:extLst>
+    <a:ext uri="{05A4C25C-085E-4340-85A3-A5531E510DB2}">
+      <thm15:themeFamily xmlns:thm15="http://schemas.microsoft.com/office/thememl/2012/main" name="Office Theme" id="{62F939B6-93AF-4DB8-9C6B-D6C7DFDC589F}" vid="{4A3C46E8-61CC-4603-A589-7422A47A8E4A}"/>
+    </a:ext>
+  </a:extLst>
 </a:theme>
 </file>
 
@@ -12061,7 +12166,10 @@
       </a:bgFillStyleLst>
     </a:fmtScheme>
   </a:themeElements>
-  <a:objectDefaults/>
-  <a:extraClrSchemeLst/>
+  <a:extLst>
+    <a:ext uri="{05A4C25C-085E-4340-85A3-A5531E510DB2}">
+      <thm15:themeFamily xmlns:thm15="http://schemas.microsoft.com/office/thememl/2012/main" name="Office Theme" id="{62F939B6-93AF-4DB8-9C6B-D6C7DFDC589F}" vid="{4A3C46E8-61CC-4603-A589-7422A47A8E4A}"/>
+    </a:ext>
+  </a:extLst>
 </a:theme>
 </file>